--- a/system-design-101/vi/lessons/sd-01-008/slides/sd-01-008.pptx
+++ b/system-design-101/vi/lessons/sd-01-008/slides/sd-01-008.pptx
@@ -16830,1485 +16830,7 @@
       </p:grpSpPr>
       <p:sp>
         <p:nvSpPr>
-          <p:cNvPr id="2" name="Text 0"/>
-          <p:cNvSpPr/>
-          <p:nvPr/>
-        </p:nvSpPr>
-        <p:spPr>
-          <a:xfrm>
-            <a:off x="914400" y="952500"/>
-            <a:ext cx="11430000" cy="323850"/>
-          </a:xfrm>
-          <a:prstGeom prst="rect">
-            <a:avLst/>
-          </a:prstGeom>
-          <a:noFill/>
-          <a:ln/>
-        </p:spPr>
-        <p:txBody>
-          <a:bodyPr wrap="square" lIns="0" tIns="0" rIns="0" bIns="0" rtlCol="0" anchor="t"/>
-          <a:lstStyle/>
-          <a:p>
-            <a:pPr algn="l" indent="0" marL="0">
-              <a:buNone/>
-            </a:pPr>
-            <a:r>
-              <a:rPr lang="en-US" sz="1800" b="1" spc="284" kern="0" dirty="0">
-                <a:solidFill>
-                  <a:srgbClr val="6B6A66"/>
-                </a:solidFill>
-                <a:latin typeface="Be Vietnam Pro" pitchFamily="34" charset="0"/>
-                <a:ea typeface="Be Vietnam Pro" pitchFamily="34" charset="-122"/>
-                <a:cs typeface="Be Vietnam Pro" pitchFamily="34" charset="-120"/>
-              </a:rPr>
-              <a:t>SÁU</a:t>
-            </a:r>
-            <a:r>
-              <a:rPr lang="en-US" sz="1800" b="1" spc="302" kern="0" dirty="0">
-                <a:solidFill>
-                  <a:srgbClr val="6B6A66"/>
-                </a:solidFill>
-                <a:latin typeface="Be Vietnam Pro" pitchFamily="34" charset="0"/>
-                <a:ea typeface="Be Vietnam Pro" pitchFamily="34" charset="-122"/>
-                <a:cs typeface="Be Vietnam Pro" pitchFamily="34" charset="-120"/>
-              </a:rPr>
-              <a:t> BƯỚC,</a:t>
-            </a:r>
-            <a:r>
-              <a:rPr lang="en-US" sz="1800" b="1" spc="280" kern="0" dirty="0">
-                <a:solidFill>
-                  <a:srgbClr val="6B6A66"/>
-                </a:solidFill>
-                <a:latin typeface="Be Vietnam Pro" pitchFamily="34" charset="0"/>
-                <a:ea typeface="Be Vietnam Pro" pitchFamily="34" charset="-122"/>
-                <a:cs typeface="Be Vietnam Pro" pitchFamily="34" charset="-120"/>
-              </a:rPr>
-              <a:t> TÓM</a:t>
-            </a:r>
-            <a:r>
-              <a:rPr lang="en-US" sz="1800" b="1" spc="297" kern="0" dirty="0">
-                <a:solidFill>
-                  <a:srgbClr val="6B6A66"/>
-                </a:solidFill>
-                <a:latin typeface="Be Vietnam Pro" pitchFamily="34" charset="0"/>
-                <a:ea typeface="Be Vietnam Pro" pitchFamily="34" charset="-122"/>
-                <a:cs typeface="Be Vietnam Pro" pitchFamily="34" charset="-120"/>
-              </a:rPr>
-              <a:t> LẠI</a:t>
-            </a:r>
-            <a:endParaRPr lang="en-US" sz="1800" dirty="0"/>
-          </a:p>
-        </p:txBody>
-      </p:sp>
-      <p:sp>
-        <p:nvSpPr>
-          <p:cNvPr id="3" name="Text 1"/>
-          <p:cNvSpPr/>
-          <p:nvPr/>
-        </p:nvSpPr>
-        <p:spPr>
-          <a:xfrm>
-            <a:off x="914400" y="1333500"/>
-            <a:ext cx="16459200" cy="952500"/>
-          </a:xfrm>
-          <a:prstGeom prst="rect">
-            <a:avLst/>
-          </a:prstGeom>
-          <a:noFill/>
-          <a:ln/>
-        </p:spPr>
-        <p:txBody>
-          <a:bodyPr wrap="square" lIns="0" tIns="0" rIns="0" bIns="0" rtlCol="0" anchor="ctr"/>
-          <a:lstStyle/>
-          <a:p>
-            <a:pPr algn="l" indent="0" marL="0">
-              <a:buNone/>
-            </a:pPr>
-            <a:r>
-              <a:rPr lang="en-US" sz="5700" dirty="0" spc="-42" kern="0">
-                <a:solidFill>
-                  <a:srgbClr val="14161C"/>
-                </a:solidFill>
-                <a:latin typeface="Bricolage Grotesque ExtraBold" pitchFamily="34" charset="0"/>
-                <a:ea typeface="Bricolage Grotesque ExtraBold" pitchFamily="34" charset="-122"/>
-                <a:cs typeface="Bricolage Grotesque ExtraBold" pitchFamily="34" charset="-120"/>
-              </a:rPr>
-              <a:t>Từ</a:t>
-            </a:r>
-            <a:r>
-              <a:rPr lang="en-US" sz="5700" dirty="0" spc="0" kern="0">
-                <a:solidFill>
-                  <a:srgbClr val="14161C"/>
-                </a:solidFill>
-                <a:latin typeface="Bricolage Grotesque ExtraBold" pitchFamily="34" charset="0"/>
-                <a:ea typeface="Bricolage Grotesque ExtraBold" pitchFamily="34" charset="-122"/>
-                <a:cs typeface="Bricolage Grotesque ExtraBold" pitchFamily="34" charset="-120"/>
-              </a:rPr>
-              <a:t> HTML</a:t>
-            </a:r>
-            <a:r>
-              <a:rPr lang="en-US" sz="5700" dirty="0" spc="-56" kern="0">
-                <a:solidFill>
-                  <a:srgbClr val="14161C"/>
-                </a:solidFill>
-                <a:latin typeface="Bricolage Grotesque ExtraBold" pitchFamily="34" charset="0"/>
-                <a:ea typeface="Bricolage Grotesque ExtraBold" pitchFamily="34" charset="-122"/>
-                <a:cs typeface="Bricolage Grotesque ExtraBold" pitchFamily="34" charset="-120"/>
-              </a:rPr>
-              <a:t> tới</a:t>
-            </a:r>
-            <a:r>
-              <a:rPr lang="en-US" sz="5700" dirty="0" spc="19" kern="0">
-                <a:solidFill>
-                  <a:srgbClr val="14161C"/>
-                </a:solidFill>
-                <a:latin typeface="Bricolage Grotesque ExtraBold" pitchFamily="34" charset="0"/>
-                <a:ea typeface="Bricolage Grotesque ExtraBold" pitchFamily="34" charset="-122"/>
-                <a:cs typeface="Bricolage Grotesque ExtraBold" pitchFamily="34" charset="-120"/>
-              </a:rPr>
-              <a:t> điểm</a:t>
-            </a:r>
-            <a:r>
-              <a:rPr lang="en-US" sz="5700" dirty="0" spc="-1" kern="0">
-                <a:solidFill>
-                  <a:srgbClr val="14161C"/>
-                </a:solidFill>
-                <a:latin typeface="Bricolage Grotesque ExtraBold" pitchFamily="34" charset="0"/>
-                <a:ea typeface="Bricolage Grotesque ExtraBold" pitchFamily="34" charset="-122"/>
-                <a:cs typeface="Bricolage Grotesque ExtraBold" pitchFamily="34" charset="-120"/>
-              </a:rPr>
-              <a:t> ảnh</a:t>
-            </a:r>
-            <a:r>
-              <a:rPr lang="en-US" sz="5700" dirty="0" spc="-5" kern="0">
-                <a:solidFill>
-                  <a:srgbClr val="14161C"/>
-                </a:solidFill>
-                <a:latin typeface="Bricolage Grotesque ExtraBold" pitchFamily="34" charset="0"/>
-                <a:ea typeface="Bricolage Grotesque ExtraBold" pitchFamily="34" charset="-122"/>
-                <a:cs typeface="Bricolage Grotesque ExtraBold" pitchFamily="34" charset="-120"/>
-              </a:rPr>
-              <a:t> là</a:t>
-            </a:r>
-            <a:r>
-              <a:rPr lang="en-US" sz="5700" dirty="0" spc="-11" kern="0">
-                <a:solidFill>
-                  <a:srgbClr val="14161C"/>
-                </a:solidFill>
-                <a:latin typeface="Bricolage Grotesque ExtraBold" pitchFamily="34" charset="0"/>
-                <a:ea typeface="Bricolage Grotesque ExtraBold" pitchFamily="34" charset="-122"/>
-                <a:cs typeface="Bricolage Grotesque ExtraBold" pitchFamily="34" charset="-120"/>
-              </a:rPr>
-              <a:t> một</a:t>
-            </a:r>
-            <a:r>
-              <a:rPr lang="en-US" sz="5700" dirty="0" spc="-3" kern="0">
-                <a:solidFill>
-                  <a:srgbClr val="14161C"/>
-                </a:solidFill>
-                <a:latin typeface="Bricolage Grotesque ExtraBold" pitchFamily="34" charset="0"/>
-                <a:ea typeface="Bricolage Grotesque ExtraBold" pitchFamily="34" charset="-122"/>
-                <a:cs typeface="Bricolage Grotesque ExtraBold" pitchFamily="34" charset="-120"/>
-              </a:rPr>
-              <a:t> chuỗi</a:t>
-            </a:r>
-            <a:r>
-              <a:rPr lang="en-US" sz="5700" dirty="0" spc="-78" kern="0">
-                <a:solidFill>
-                  <a:srgbClr val="14161C"/>
-                </a:solidFill>
-                <a:latin typeface="Bricolage Grotesque ExtraBold" pitchFamily="34" charset="0"/>
-                <a:ea typeface="Bricolage Grotesque ExtraBold" pitchFamily="34" charset="-122"/>
-                <a:cs typeface="Bricolage Grotesque ExtraBold" pitchFamily="34" charset="-120"/>
-              </a:rPr>
-              <a:t> bước</a:t>
-            </a:r>
-            <a:endParaRPr lang="en-US" sz="5700" dirty="0"/>
-          </a:p>
-        </p:txBody>
-      </p:sp>
-      <p:sp>
-        <p:nvSpPr>
-          <p:cNvPr id="4" name="Shape 2"/>
-          <p:cNvSpPr/>
-          <p:nvPr/>
-        </p:nvSpPr>
-        <p:spPr>
-          <a:xfrm>
-            <a:off x="914400" y="2857500"/>
-            <a:ext cx="2571750" cy="4000500"/>
-          </a:xfrm>
-          <a:prstGeom prst="roundRect">
-            <a:avLst>
-              <a:gd name="adj" fmla="val 10370"/>
-            </a:avLst>
-          </a:prstGeom>
-          <a:solidFill>
-            <a:srgbClr val="DDE3FA"/>
-          </a:solidFill>
-          <a:ln/>
-        </p:spPr>
-      </p:sp>
-      <p:sp>
-        <p:nvSpPr>
-          <p:cNvPr id="5" name="Shape 3"/>
-          <p:cNvSpPr/>
-          <p:nvPr/>
-        </p:nvSpPr>
-        <p:spPr>
-          <a:xfrm>
-            <a:off x="3695700" y="2857500"/>
-            <a:ext cx="2571750" cy="4000500"/>
-          </a:xfrm>
-          <a:prstGeom prst="roundRect">
-            <a:avLst>
-              <a:gd name="adj" fmla="val 10370"/>
-            </a:avLst>
-          </a:prstGeom>
-          <a:solidFill>
-            <a:srgbClr val="F3DFB8"/>
-          </a:solidFill>
-          <a:ln/>
-        </p:spPr>
-      </p:sp>
-      <p:sp>
-        <p:nvSpPr>
-          <p:cNvPr id="6" name="Shape 4"/>
-          <p:cNvSpPr/>
-          <p:nvPr/>
-        </p:nvSpPr>
-        <p:spPr>
-          <a:xfrm>
-            <a:off x="6477000" y="2857500"/>
-            <a:ext cx="2571750" cy="4000500"/>
-          </a:xfrm>
-          <a:prstGeom prst="roundRect">
-            <a:avLst>
-              <a:gd name="adj" fmla="val 10370"/>
-            </a:avLst>
-          </a:prstGeom>
-          <a:solidFill>
-            <a:srgbClr val="CFE8E2"/>
-          </a:solidFill>
-          <a:ln/>
-        </p:spPr>
-      </p:sp>
-      <p:sp>
-        <p:nvSpPr>
-          <p:cNvPr id="7" name="Shape 5"/>
-          <p:cNvSpPr/>
-          <p:nvPr/>
-        </p:nvSpPr>
-        <p:spPr>
-          <a:xfrm>
-            <a:off x="9258300" y="2857500"/>
-            <a:ext cx="2571750" cy="4000500"/>
-          </a:xfrm>
-          <a:prstGeom prst="roundRect">
-            <a:avLst>
-              <a:gd name="adj" fmla="val 10370"/>
-            </a:avLst>
-          </a:prstGeom>
-          <a:solidFill>
-            <a:srgbClr val="F8D9D0"/>
-          </a:solidFill>
-          <a:ln/>
-        </p:spPr>
-      </p:sp>
-      <p:sp>
-        <p:nvSpPr>
-          <p:cNvPr id="8" name="Shape 6"/>
-          <p:cNvSpPr/>
-          <p:nvPr/>
-        </p:nvSpPr>
-        <p:spPr>
-          <a:xfrm>
-            <a:off x="12039600" y="2857500"/>
-            <a:ext cx="2571750" cy="4000500"/>
-          </a:xfrm>
-          <a:prstGeom prst="roundRect">
-            <a:avLst>
-              <a:gd name="adj" fmla="val 10370"/>
-            </a:avLst>
-          </a:prstGeom>
-          <a:solidFill>
-            <a:srgbClr val="DDE3FA"/>
-          </a:solidFill>
-          <a:ln/>
-        </p:spPr>
-      </p:sp>
-      <p:sp>
-        <p:nvSpPr>
-          <p:cNvPr id="9" name="Shape 7"/>
-          <p:cNvSpPr/>
-          <p:nvPr/>
-        </p:nvSpPr>
-        <p:spPr>
-          <a:xfrm>
-            <a:off x="14820900" y="2857500"/>
-            <a:ext cx="2552700" cy="4000500"/>
-          </a:xfrm>
-          <a:prstGeom prst="roundRect">
-            <a:avLst>
-              <a:gd name="adj" fmla="val 10448"/>
-            </a:avLst>
-          </a:prstGeom>
-          <a:solidFill>
-            <a:srgbClr val="CFE8E2"/>
-          </a:solidFill>
-          <a:ln/>
-        </p:spPr>
-      </p:sp>
-      <p:sp>
-        <p:nvSpPr>
-          <p:cNvPr id="10" name="Text 8"/>
-          <p:cNvSpPr/>
-          <p:nvPr/>
-        </p:nvSpPr>
-        <p:spPr>
-          <a:xfrm>
-            <a:off x="1181100" y="3086100"/>
-            <a:ext cx="1905000" cy="1143000"/>
-          </a:xfrm>
-          <a:prstGeom prst="rect">
-            <a:avLst/>
-          </a:prstGeom>
-          <a:noFill/>
-          <a:ln/>
-        </p:spPr>
-        <p:txBody>
-          <a:bodyPr wrap="square" lIns="0" tIns="0" rIns="0" bIns="0" rtlCol="0" anchor="ctr"/>
-          <a:lstStyle/>
-          <a:p>
-            <a:pPr algn="l" indent="0" marL="0">
-              <a:buNone/>
-            </a:pPr>
-            <a:r>
-              <a:rPr lang="en-US" sz="7500" dirty="0" kern="0">
-                <a:solidFill>
-                  <a:srgbClr val="1F3FD1"/>
-                </a:solidFill>
-                <a:latin typeface="Bricolage Grotesque ExtraBold" pitchFamily="34" charset="0"/>
-                <a:ea typeface="Bricolage Grotesque ExtraBold" pitchFamily="34" charset="-122"/>
-                <a:cs typeface="Bricolage Grotesque ExtraBold" pitchFamily="34" charset="-120"/>
-              </a:rPr>
-              <a:t>1</a:t>
-            </a:r>
-            <a:endParaRPr lang="en-US" sz="7500" dirty="0"/>
-          </a:p>
-        </p:txBody>
-      </p:sp>
-      <p:sp>
-        <p:nvSpPr>
-          <p:cNvPr id="11" name="Text 9"/>
-          <p:cNvSpPr/>
-          <p:nvPr/>
-        </p:nvSpPr>
-        <p:spPr>
-          <a:xfrm>
-            <a:off x="3962400" y="3086100"/>
-            <a:ext cx="1905000" cy="1143000"/>
-          </a:xfrm>
-          <a:prstGeom prst="rect">
-            <a:avLst/>
-          </a:prstGeom>
-          <a:noFill/>
-          <a:ln/>
-        </p:spPr>
-        <p:txBody>
-          <a:bodyPr wrap="square" lIns="0" tIns="0" rIns="0" bIns="0" rtlCol="0" anchor="ctr"/>
-          <a:lstStyle/>
-          <a:p>
-            <a:pPr algn="l" indent="0" marL="0">
-              <a:buNone/>
-            </a:pPr>
-            <a:r>
-              <a:rPr lang="en-US" sz="7500" dirty="0" spc="-5" kern="0">
-                <a:solidFill>
-                  <a:srgbClr val="B45309"/>
-                </a:solidFill>
-                <a:latin typeface="Bricolage Grotesque ExtraBold" pitchFamily="34" charset="0"/>
-                <a:ea typeface="Bricolage Grotesque ExtraBold" pitchFamily="34" charset="-122"/>
-                <a:cs typeface="Bricolage Grotesque ExtraBold" pitchFamily="34" charset="-120"/>
-              </a:rPr>
-              <a:t>2</a:t>
-            </a:r>
-            <a:endParaRPr lang="en-US" sz="7500" dirty="0"/>
-          </a:p>
-        </p:txBody>
-      </p:sp>
-      <p:sp>
-        <p:nvSpPr>
-          <p:cNvPr id="12" name="Text 10"/>
-          <p:cNvSpPr/>
-          <p:nvPr/>
-        </p:nvSpPr>
-        <p:spPr>
-          <a:xfrm>
-            <a:off x="6743700" y="3086100"/>
-            <a:ext cx="1905000" cy="1143000"/>
-          </a:xfrm>
-          <a:prstGeom prst="rect">
-            <a:avLst/>
-          </a:prstGeom>
-          <a:noFill/>
-          <a:ln/>
-        </p:spPr>
-        <p:txBody>
-          <a:bodyPr wrap="square" lIns="0" tIns="0" rIns="0" bIns="0" rtlCol="0" anchor="ctr"/>
-          <a:lstStyle/>
-          <a:p>
-            <a:pPr algn="l" indent="0" marL="0">
-              <a:buNone/>
-            </a:pPr>
-            <a:r>
-              <a:rPr lang="en-US" sz="7500" dirty="0" kern="0">
-                <a:solidFill>
-                  <a:srgbClr val="0F766E"/>
-                </a:solidFill>
-                <a:latin typeface="Bricolage Grotesque ExtraBold" pitchFamily="34" charset="0"/>
-                <a:ea typeface="Bricolage Grotesque ExtraBold" pitchFamily="34" charset="-122"/>
-                <a:cs typeface="Bricolage Grotesque ExtraBold" pitchFamily="34" charset="-120"/>
-              </a:rPr>
-              <a:t>3</a:t>
-            </a:r>
-            <a:endParaRPr lang="en-US" sz="7500" dirty="0"/>
-          </a:p>
-        </p:txBody>
-      </p:sp>
-      <p:sp>
-        <p:nvSpPr>
-          <p:cNvPr id="13" name="Text 11"/>
-          <p:cNvSpPr/>
-          <p:nvPr/>
-        </p:nvSpPr>
-        <p:spPr>
-          <a:xfrm>
-            <a:off x="9525000" y="3086100"/>
-            <a:ext cx="1905000" cy="1143000"/>
-          </a:xfrm>
-          <a:prstGeom prst="rect">
-            <a:avLst/>
-          </a:prstGeom>
-          <a:noFill/>
-          <a:ln/>
-        </p:spPr>
-        <p:txBody>
-          <a:bodyPr wrap="square" lIns="0" tIns="0" rIns="0" bIns="0" rtlCol="0" anchor="ctr"/>
-          <a:lstStyle/>
-          <a:p>
-            <a:pPr algn="l" indent="0" marL="0">
-              <a:buNone/>
-            </a:pPr>
-            <a:r>
-              <a:rPr lang="en-US" sz="7500" dirty="0" spc="2" kern="0">
-                <a:solidFill>
-                  <a:srgbClr val="E8472B"/>
-                </a:solidFill>
-                <a:latin typeface="Bricolage Grotesque ExtraBold" pitchFamily="34" charset="0"/>
-                <a:ea typeface="Bricolage Grotesque ExtraBold" pitchFamily="34" charset="-122"/>
-                <a:cs typeface="Bricolage Grotesque ExtraBold" pitchFamily="34" charset="-120"/>
-              </a:rPr>
-              <a:t>4</a:t>
-            </a:r>
-            <a:endParaRPr lang="en-US" sz="7500" dirty="0"/>
-          </a:p>
-        </p:txBody>
-      </p:sp>
-      <p:sp>
-        <p:nvSpPr>
-          <p:cNvPr id="14" name="Text 12"/>
-          <p:cNvSpPr/>
-          <p:nvPr/>
-        </p:nvSpPr>
-        <p:spPr>
-          <a:xfrm>
-            <a:off x="12306300" y="3086100"/>
-            <a:ext cx="1905000" cy="1143000"/>
-          </a:xfrm>
-          <a:prstGeom prst="rect">
-            <a:avLst/>
-          </a:prstGeom>
-          <a:noFill/>
-          <a:ln/>
-        </p:spPr>
-        <p:txBody>
-          <a:bodyPr wrap="square" lIns="0" tIns="0" rIns="0" bIns="0" rtlCol="0" anchor="ctr"/>
-          <a:lstStyle/>
-          <a:p>
-            <a:pPr algn="l" indent="0" marL="0">
-              <a:buNone/>
-            </a:pPr>
-            <a:r>
-              <a:rPr lang="en-US" sz="7500" dirty="0" kern="0">
-                <a:solidFill>
-                  <a:srgbClr val="1F3FD1"/>
-                </a:solidFill>
-                <a:latin typeface="Bricolage Grotesque ExtraBold" pitchFamily="34" charset="0"/>
-                <a:ea typeface="Bricolage Grotesque ExtraBold" pitchFamily="34" charset="-122"/>
-                <a:cs typeface="Bricolage Grotesque ExtraBold" pitchFamily="34" charset="-120"/>
-              </a:rPr>
-              <a:t>5</a:t>
-            </a:r>
-            <a:endParaRPr lang="en-US" sz="7500" dirty="0"/>
-          </a:p>
-        </p:txBody>
-      </p:sp>
-      <p:sp>
-        <p:nvSpPr>
-          <p:cNvPr id="15" name="Text 13"/>
-          <p:cNvSpPr/>
-          <p:nvPr/>
-        </p:nvSpPr>
-        <p:spPr>
-          <a:xfrm>
-            <a:off x="15087600" y="3086100"/>
-            <a:ext cx="1905000" cy="1143000"/>
-          </a:xfrm>
-          <a:prstGeom prst="rect">
-            <a:avLst/>
-          </a:prstGeom>
-          <a:noFill/>
-          <a:ln/>
-        </p:spPr>
-        <p:txBody>
-          <a:bodyPr wrap="square" lIns="0" tIns="0" rIns="0" bIns="0" rtlCol="0" anchor="ctr"/>
-          <a:lstStyle/>
-          <a:p>
-            <a:pPr algn="l" indent="0" marL="0">
-              <a:buNone/>
-            </a:pPr>
-            <a:r>
-              <a:rPr lang="en-US" sz="7500" dirty="0" spc="2" kern="0">
-                <a:solidFill>
-                  <a:srgbClr val="0F766E"/>
-                </a:solidFill>
-                <a:latin typeface="Bricolage Grotesque ExtraBold" pitchFamily="34" charset="0"/>
-                <a:ea typeface="Bricolage Grotesque ExtraBold" pitchFamily="34" charset="-122"/>
-                <a:cs typeface="Bricolage Grotesque ExtraBold" pitchFamily="34" charset="-120"/>
-              </a:rPr>
-              <a:t>6</a:t>
-            </a:r>
-            <a:endParaRPr lang="en-US" sz="7500" dirty="0"/>
-          </a:p>
-        </p:txBody>
-      </p:sp>
-      <p:sp>
-        <p:nvSpPr>
-          <p:cNvPr id="16" name="Text 14"/>
-          <p:cNvSpPr/>
-          <p:nvPr/>
-        </p:nvSpPr>
-        <p:spPr>
-          <a:xfrm>
-            <a:off x="1181100" y="4572000"/>
-            <a:ext cx="2114550" cy="857250"/>
-          </a:xfrm>
-          <a:prstGeom prst="rect">
-            <a:avLst/>
-          </a:prstGeom>
-          <a:noFill/>
-          <a:ln/>
-        </p:spPr>
-        <p:txBody>
-          <a:bodyPr wrap="square" lIns="0" tIns="0" rIns="0" bIns="0" rtlCol="0" anchor="t"/>
-          <a:lstStyle/>
-          <a:p>
-            <a:pPr algn="l" indent="0" marL="0">
-              <a:buNone/>
-            </a:pPr>
-            <a:r>
-              <a:rPr lang="en-US" sz="2400" b="1" dirty="0">
-                <a:solidFill>
-                  <a:srgbClr val="14161C"/>
-                </a:solidFill>
-                <a:latin typeface="Be Vietnam Pro" pitchFamily="34" charset="0"/>
-                <a:ea typeface="Be Vietnam Pro" pitchFamily="34" charset="-122"/>
-                <a:cs typeface="Be Vietnam Pro" pitchFamily="34" charset="-120"/>
-              </a:rPr>
-              <a:t>HTML → DOM</a:t>
-            </a:r>
-            <a:endParaRPr lang="en-US" sz="2400" dirty="0"/>
-          </a:p>
-        </p:txBody>
-      </p:sp>
-      <p:sp>
-        <p:nvSpPr>
-          <p:cNvPr id="17" name="Text 15"/>
-          <p:cNvSpPr/>
-          <p:nvPr/>
-        </p:nvSpPr>
-        <p:spPr>
-          <a:xfrm>
-            <a:off x="1181100" y="5619750"/>
-            <a:ext cx="2114550" cy="1047750"/>
-          </a:xfrm>
-          <a:prstGeom prst="rect">
-            <a:avLst/>
-          </a:prstGeom>
-          <a:noFill/>
-          <a:ln/>
-        </p:spPr>
-        <p:txBody>
-          <a:bodyPr wrap="square" lIns="0" tIns="10525" rIns="0" bIns="-10525" rtlCol="0" anchor="t"/>
-          <a:lstStyle/>
-          <a:p>
-            <a:pPr algn="l" indent="0" marL="0">
-              <a:lnSpc>
-                <a:spcPts val="2535"/>
-              </a:lnSpc>
-              <a:buNone/>
-            </a:pPr>
-            <a:r>
-              <a:rPr lang="en-US" sz="1950" dirty="0" spc="-11" kern="0">
-                <a:solidFill>
-                  <a:srgbClr val="3B3A37"/>
-                </a:solidFill>
-                <a:latin typeface="Be Vietnam Pro" pitchFamily="34" charset="0"/>
-                <a:ea typeface="Be Vietnam Pro" pitchFamily="34" charset="-122"/>
-                <a:cs typeface="Be Vietnam Pro" pitchFamily="34" charset="-120"/>
-              </a:rPr>
-              <a:t>Cây</a:t>
-            </a:r>
-            <a:r>
-              <a:rPr lang="en-US" sz="1950" dirty="0" spc="-2" kern="0">
-                <a:solidFill>
-                  <a:srgbClr val="3B3A37"/>
-                </a:solidFill>
-                <a:latin typeface="Be Vietnam Pro" pitchFamily="34" charset="0"/>
-                <a:ea typeface="Be Vietnam Pro" pitchFamily="34" charset="-122"/>
-                <a:cs typeface="Be Vietnam Pro" pitchFamily="34" charset="-120"/>
-              </a:rPr>
-              <a:t> DOM</a:t>
-            </a:r>
-            <a:endParaRPr lang="en-US" sz="1950" dirty="0"/>
-          </a:p>
-        </p:txBody>
-      </p:sp>
-      <p:sp>
-        <p:nvSpPr>
-          <p:cNvPr id="18" name="Text 16"/>
-          <p:cNvSpPr/>
-          <p:nvPr/>
-        </p:nvSpPr>
-        <p:spPr>
-          <a:xfrm>
-            <a:off x="3962400" y="4572000"/>
-            <a:ext cx="2114550" cy="857250"/>
-          </a:xfrm>
-          <a:prstGeom prst="rect">
-            <a:avLst/>
-          </a:prstGeom>
-          <a:noFill/>
-          <a:ln/>
-        </p:spPr>
-        <p:txBody>
-          <a:bodyPr wrap="square" lIns="0" tIns="0" rIns="0" bIns="0" rtlCol="0" anchor="t"/>
-          <a:lstStyle/>
-          <a:p>
-            <a:pPr algn="l" indent="0" marL="0">
-              <a:buNone/>
-            </a:pPr>
-            <a:r>
-              <a:rPr lang="en-US" sz="2400" b="1" dirty="0">
-                <a:solidFill>
-                  <a:srgbClr val="14161C"/>
-                </a:solidFill>
-                <a:latin typeface="Be Vietnam Pro" pitchFamily="34" charset="0"/>
-                <a:ea typeface="Be Vietnam Pro" pitchFamily="34" charset="-122"/>
-                <a:cs typeface="Be Vietnam Pro" pitchFamily="34" charset="-120"/>
-              </a:rPr>
-              <a:t>CSS → CSSOM</a:t>
-            </a:r>
-            <a:endParaRPr lang="en-US" sz="2400" dirty="0"/>
-          </a:p>
-        </p:txBody>
-      </p:sp>
-      <p:sp>
-        <p:nvSpPr>
-          <p:cNvPr id="19" name="Text 17"/>
-          <p:cNvSpPr/>
-          <p:nvPr/>
-        </p:nvSpPr>
-        <p:spPr>
-          <a:xfrm>
-            <a:off x="3962400" y="5619750"/>
-            <a:ext cx="2114550" cy="1047750"/>
-          </a:xfrm>
-          <a:prstGeom prst="rect">
-            <a:avLst/>
-          </a:prstGeom>
-          <a:noFill/>
-          <a:ln/>
-        </p:spPr>
-        <p:txBody>
-          <a:bodyPr wrap="square" lIns="0" tIns="10525" rIns="0" bIns="-10525" rtlCol="0" anchor="t"/>
-          <a:lstStyle/>
-          <a:p>
-            <a:pPr algn="l" indent="0" marL="0">
-              <a:lnSpc>
-                <a:spcPts val="2535"/>
-              </a:lnSpc>
-              <a:buNone/>
-            </a:pPr>
-            <a:r>
-              <a:rPr lang="en-US" sz="1950" dirty="0" spc="-11" kern="0">
-                <a:solidFill>
-                  <a:srgbClr val="3B3A37"/>
-                </a:solidFill>
-                <a:latin typeface="Be Vietnam Pro" pitchFamily="34" charset="0"/>
-                <a:ea typeface="Be Vietnam Pro" pitchFamily="34" charset="-122"/>
-                <a:cs typeface="Be Vietnam Pro" pitchFamily="34" charset="-120"/>
-              </a:rPr>
-              <a:t>Cây</a:t>
-            </a:r>
-            <a:r>
-              <a:rPr lang="en-US" sz="1950" dirty="0" spc="5" kern="0">
-                <a:solidFill>
-                  <a:srgbClr val="3B3A37"/>
-                </a:solidFill>
-                <a:latin typeface="Be Vietnam Pro" pitchFamily="34" charset="0"/>
-                <a:ea typeface="Be Vietnam Pro" pitchFamily="34" charset="-122"/>
-                <a:cs typeface="Be Vietnam Pro" pitchFamily="34" charset="-120"/>
-              </a:rPr>
-              <a:t> CSSOM</a:t>
-            </a:r>
-            <a:endParaRPr lang="en-US" sz="1950" dirty="0"/>
-          </a:p>
-        </p:txBody>
-      </p:sp>
-      <p:sp>
-        <p:nvSpPr>
-          <p:cNvPr id="20" name="Text 18"/>
-          <p:cNvSpPr/>
-          <p:nvPr/>
-        </p:nvSpPr>
-        <p:spPr>
-          <a:xfrm>
-            <a:off x="6743700" y="4572000"/>
-            <a:ext cx="2114550" cy="857250"/>
-          </a:xfrm>
-          <a:prstGeom prst="rect">
-            <a:avLst/>
-          </a:prstGeom>
-          <a:noFill/>
-          <a:ln/>
-        </p:spPr>
-        <p:txBody>
-          <a:bodyPr wrap="square" lIns="0" tIns="0" rIns="0" bIns="0" rtlCol="0" anchor="t"/>
-          <a:lstStyle/>
-          <a:p>
-            <a:pPr algn="l" indent="0" marL="0">
-              <a:buNone/>
-            </a:pPr>
-            <a:r>
-              <a:rPr lang="en-US" sz="2400" b="1" dirty="0" spc="-28" kern="0">
-                <a:solidFill>
-                  <a:srgbClr val="14161C"/>
-                </a:solidFill>
-                <a:latin typeface="Be Vietnam Pro" pitchFamily="34" charset="0"/>
-                <a:ea typeface="Be Vietnam Pro" pitchFamily="34" charset="-122"/>
-                <a:cs typeface="Be Vietnam Pro" pitchFamily="34" charset="-120"/>
-              </a:rPr>
-              <a:t>Render</a:t>
-            </a:r>
-            <a:r>
-              <a:rPr lang="en-US" sz="2400" b="1" dirty="0" spc="-14" kern="0">
-                <a:solidFill>
-                  <a:srgbClr val="14161C"/>
-                </a:solidFill>
-                <a:latin typeface="Be Vietnam Pro" pitchFamily="34" charset="0"/>
-                <a:ea typeface="Be Vietnam Pro" pitchFamily="34" charset="-122"/>
-                <a:cs typeface="Be Vietnam Pro" pitchFamily="34" charset="-120"/>
-              </a:rPr>
-              <a:t> tree</a:t>
-            </a:r>
-            <a:endParaRPr lang="en-US" sz="2400" dirty="0"/>
-          </a:p>
-        </p:txBody>
-      </p:sp>
-      <p:sp>
-        <p:nvSpPr>
-          <p:cNvPr id="21" name="Text 19"/>
-          <p:cNvSpPr/>
-          <p:nvPr/>
-        </p:nvSpPr>
-        <p:spPr>
-          <a:xfrm>
-            <a:off x="6743700" y="5619750"/>
-            <a:ext cx="2114550" cy="1047750"/>
-          </a:xfrm>
-          <a:prstGeom prst="rect">
-            <a:avLst/>
-          </a:prstGeom>
-          <a:noFill/>
-          <a:ln/>
-        </p:spPr>
-        <p:txBody>
-          <a:bodyPr wrap="square" lIns="0" tIns="10525" rIns="0" bIns="-10525" rtlCol="0" anchor="t"/>
-          <a:lstStyle/>
-          <a:p>
-            <a:pPr algn="l" indent="0" marL="0">
-              <a:lnSpc>
-                <a:spcPts val="2535"/>
-              </a:lnSpc>
-              <a:buNone/>
-            </a:pPr>
-            <a:r>
-              <a:rPr lang="en-US" sz="1950" dirty="0" spc="-2" kern="0">
-                <a:solidFill>
-                  <a:srgbClr val="3B3A37"/>
-                </a:solidFill>
-                <a:latin typeface="Be Vietnam Pro" pitchFamily="34" charset="0"/>
-                <a:ea typeface="Be Vietnam Pro" pitchFamily="34" charset="-122"/>
-                <a:cs typeface="Be Vietnam Pro" pitchFamily="34" charset="-120"/>
-              </a:rPr>
-              <a:t>Gộp</a:t>
-            </a:r>
-            <a:r>
-              <a:rPr lang="en-US" sz="1950" dirty="0" spc="1" kern="0">
-                <a:solidFill>
-                  <a:srgbClr val="3B3A37"/>
-                </a:solidFill>
-                <a:latin typeface="Be Vietnam Pro" pitchFamily="34" charset="0"/>
-                <a:ea typeface="Be Vietnam Pro" pitchFamily="34" charset="-122"/>
-                <a:cs typeface="Be Vietnam Pro" pitchFamily="34" charset="-120"/>
-              </a:rPr>
-              <a:t> hai</a:t>
-            </a:r>
-            <a:r>
-              <a:rPr lang="en-US" sz="1950" dirty="0" spc="-10" kern="0">
-                <a:solidFill>
-                  <a:srgbClr val="3B3A37"/>
-                </a:solidFill>
-                <a:latin typeface="Be Vietnam Pro" pitchFamily="34" charset="0"/>
-                <a:ea typeface="Be Vietnam Pro" pitchFamily="34" charset="-122"/>
-                <a:cs typeface="Be Vietnam Pro" pitchFamily="34" charset="-120"/>
-              </a:rPr>
-              <a:t> cây</a:t>
-            </a:r>
-            <a:endParaRPr lang="en-US" sz="1950" dirty="0"/>
-          </a:p>
-        </p:txBody>
-      </p:sp>
-      <p:sp>
-        <p:nvSpPr>
-          <p:cNvPr id="22" name="Text 20"/>
-          <p:cNvSpPr/>
-          <p:nvPr/>
-        </p:nvSpPr>
-        <p:spPr>
-          <a:xfrm>
-            <a:off x="9525000" y="4572000"/>
-            <a:ext cx="2114550" cy="857250"/>
-          </a:xfrm>
-          <a:prstGeom prst="rect">
-            <a:avLst/>
-          </a:prstGeom>
-          <a:noFill/>
-          <a:ln/>
-        </p:spPr>
-        <p:txBody>
-          <a:bodyPr wrap="square" lIns="0" tIns="0" rIns="0" bIns="0" rtlCol="0" anchor="t"/>
-          <a:lstStyle/>
-          <a:p>
-            <a:pPr algn="l" indent="0" marL="0">
-              <a:buNone/>
-            </a:pPr>
-            <a:r>
-              <a:rPr lang="en-US" sz="2400" b="1" dirty="0" spc="-27" kern="0">
-                <a:solidFill>
-                  <a:srgbClr val="14161C"/>
-                </a:solidFill>
-                <a:latin typeface="Be Vietnam Pro" pitchFamily="34" charset="0"/>
-                <a:ea typeface="Be Vietnam Pro" pitchFamily="34" charset="-122"/>
-                <a:cs typeface="Be Vietnam Pro" pitchFamily="34" charset="-120"/>
-              </a:rPr>
-              <a:t>Layout</a:t>
-            </a:r>
-            <a:endParaRPr lang="en-US" sz="2400" dirty="0"/>
-          </a:p>
-        </p:txBody>
-      </p:sp>
-      <p:sp>
-        <p:nvSpPr>
-          <p:cNvPr id="23" name="Text 21"/>
-          <p:cNvSpPr/>
-          <p:nvPr/>
-        </p:nvSpPr>
-        <p:spPr>
-          <a:xfrm>
-            <a:off x="9525000" y="5619750"/>
-            <a:ext cx="2114550" cy="1047750"/>
-          </a:xfrm>
-          <a:prstGeom prst="rect">
-            <a:avLst/>
-          </a:prstGeom>
-          <a:noFill/>
-          <a:ln/>
-        </p:spPr>
-        <p:txBody>
-          <a:bodyPr wrap="square" lIns="0" tIns="10525" rIns="0" bIns="-10525" rtlCol="0" anchor="t"/>
-          <a:lstStyle/>
-          <a:p>
-            <a:pPr algn="l" indent="0" marL="0">
-              <a:lnSpc>
-                <a:spcPts val="2535"/>
-              </a:lnSpc>
-              <a:buNone/>
-            </a:pPr>
-            <a:r>
-              <a:rPr lang="en-US" sz="1950" dirty="0" spc="-1" kern="0">
-                <a:solidFill>
-                  <a:srgbClr val="3B3A37"/>
-                </a:solidFill>
-                <a:latin typeface="Be Vietnam Pro" pitchFamily="34" charset="0"/>
-                <a:ea typeface="Be Vietnam Pro" pitchFamily="34" charset="-122"/>
-                <a:cs typeface="Be Vietnam Pro" pitchFamily="34" charset="-120"/>
-              </a:rPr>
-              <a:t>Kích</a:t>
-            </a:r>
-            <a:r>
-              <a:rPr lang="en-US" sz="1950" dirty="0" spc="2" kern="0">
-                <a:solidFill>
-                  <a:srgbClr val="3B3A37"/>
-                </a:solidFill>
-                <a:latin typeface="Be Vietnam Pro" pitchFamily="34" charset="0"/>
-                <a:ea typeface="Be Vietnam Pro" pitchFamily="34" charset="-122"/>
-                <a:cs typeface="Be Vietnam Pro" pitchFamily="34" charset="-120"/>
-              </a:rPr>
-              <a:t> thước,</a:t>
-            </a:r>
-            <a:r>
-              <a:rPr lang="en-US" sz="1950" dirty="0" spc="0" kern="0">
-                <a:solidFill>
-                  <a:srgbClr val="3B3A37"/>
-                </a:solidFill>
-                <a:latin typeface="Be Vietnam Pro" pitchFamily="34" charset="0"/>
-                <a:ea typeface="Be Vietnam Pro" pitchFamily="34" charset="-122"/>
-                <a:cs typeface="Be Vietnam Pro" pitchFamily="34" charset="-120"/>
-              </a:rPr>
-              <a:t> vị</a:t>
-            </a:r>
-            <a:r>
-              <a:rPr lang="en-US" sz="1950" dirty="0" spc="9" kern="0">
-                <a:solidFill>
-                  <a:srgbClr val="3B3A37"/>
-                </a:solidFill>
-                <a:latin typeface="Be Vietnam Pro" pitchFamily="34" charset="0"/>
-                <a:ea typeface="Be Vietnam Pro" pitchFamily="34" charset="-122"/>
-                <a:cs typeface="Be Vietnam Pro" pitchFamily="34" charset="-120"/>
-              </a:rPr>
-              <a:t> trí</a:t>
-            </a:r>
-            <a:endParaRPr lang="en-US" sz="1950" dirty="0"/>
-          </a:p>
-        </p:txBody>
-      </p:sp>
-      <p:sp>
-        <p:nvSpPr>
-          <p:cNvPr id="24" name="Text 22"/>
-          <p:cNvSpPr/>
-          <p:nvPr/>
-        </p:nvSpPr>
-        <p:spPr>
-          <a:xfrm>
-            <a:off x="12306300" y="4572000"/>
-            <a:ext cx="2114550" cy="857250"/>
-          </a:xfrm>
-          <a:prstGeom prst="rect">
-            <a:avLst/>
-          </a:prstGeom>
-          <a:noFill/>
-          <a:ln/>
-        </p:spPr>
-        <p:txBody>
-          <a:bodyPr wrap="square" lIns="0" tIns="0" rIns="0" bIns="0" rtlCol="0" anchor="t"/>
-          <a:lstStyle/>
-          <a:p>
-            <a:pPr algn="l" indent="0" marL="0">
-              <a:buNone/>
-            </a:pPr>
-            <a:r>
-              <a:rPr lang="en-US" sz="2400" b="1" dirty="0" spc="-14" kern="0">
-                <a:solidFill>
-                  <a:srgbClr val="14161C"/>
-                </a:solidFill>
-                <a:latin typeface="Be Vietnam Pro" pitchFamily="34" charset="0"/>
-                <a:ea typeface="Be Vietnam Pro" pitchFamily="34" charset="-122"/>
-                <a:cs typeface="Be Vietnam Pro" pitchFamily="34" charset="-120"/>
-              </a:rPr>
-              <a:t>Paint</a:t>
-            </a:r>
-            <a:r>
-              <a:rPr lang="en-US" sz="2400" b="1" dirty="0" spc="1" kern="0">
-                <a:solidFill>
-                  <a:srgbClr val="14161C"/>
-                </a:solidFill>
-                <a:latin typeface="Be Vietnam Pro" pitchFamily="34" charset="0"/>
-                <a:ea typeface="Be Vietnam Pro" pitchFamily="34" charset="-122"/>
-                <a:cs typeface="Be Vietnam Pro" pitchFamily="34" charset="-120"/>
-              </a:rPr>
-              <a:t> /</a:t>
-            </a:r>
-            <a:r>
-              <a:rPr lang="en-US" sz="2400" b="1" dirty="0" spc="-23" kern="0">
-                <a:solidFill>
-                  <a:srgbClr val="14161C"/>
-                </a:solidFill>
-                <a:latin typeface="Be Vietnam Pro" pitchFamily="34" charset="0"/>
-                <a:ea typeface="Be Vietnam Pro" pitchFamily="34" charset="-122"/>
-                <a:cs typeface="Be Vietnam Pro" pitchFamily="34" charset="-120"/>
-              </a:rPr>
-              <a:t> Raster</a:t>
-            </a:r>
-            <a:endParaRPr lang="en-US" sz="2400" dirty="0"/>
-          </a:p>
-        </p:txBody>
-      </p:sp>
-      <p:sp>
-        <p:nvSpPr>
-          <p:cNvPr id="25" name="Text 23"/>
-          <p:cNvSpPr/>
-          <p:nvPr/>
-        </p:nvSpPr>
-        <p:spPr>
-          <a:xfrm>
-            <a:off x="12306300" y="5619750"/>
-            <a:ext cx="2114550" cy="1047750"/>
-          </a:xfrm>
-          <a:prstGeom prst="rect">
-            <a:avLst/>
-          </a:prstGeom>
-          <a:noFill/>
-          <a:ln/>
-        </p:spPr>
-        <p:txBody>
-          <a:bodyPr wrap="square" lIns="0" tIns="10525" rIns="0" bIns="-10525" rtlCol="0" anchor="t"/>
-          <a:lstStyle/>
-          <a:p>
-            <a:pPr algn="l" indent="0" marL="0">
-              <a:lnSpc>
-                <a:spcPts val="2535"/>
-              </a:lnSpc>
-              <a:buNone/>
-            </a:pPr>
-            <a:r>
-              <a:rPr lang="en-US" sz="1950" dirty="0">
-                <a:solidFill>
-                  <a:srgbClr val="3B3A37"/>
-                </a:solidFill>
-                <a:latin typeface="Be Vietnam Pro" pitchFamily="34" charset="0"/>
-                <a:ea typeface="Be Vietnam Pro" pitchFamily="34" charset="-122"/>
-                <a:cs typeface="Be Vietnam Pro" pitchFamily="34" charset="-120"/>
-              </a:rPr>
-              <a:t>Lệnh vẽ → điểm ảnh</a:t>
-            </a:r>
-            <a:endParaRPr lang="en-US" sz="1950" dirty="0"/>
-          </a:p>
-        </p:txBody>
-      </p:sp>
-      <p:sp>
-        <p:nvSpPr>
-          <p:cNvPr id="26" name="Text 24"/>
-          <p:cNvSpPr/>
-          <p:nvPr/>
-        </p:nvSpPr>
-        <p:spPr>
-          <a:xfrm>
-            <a:off x="15087600" y="4572000"/>
-            <a:ext cx="2114550" cy="857250"/>
-          </a:xfrm>
-          <a:prstGeom prst="rect">
-            <a:avLst/>
-          </a:prstGeom>
-          <a:noFill/>
-          <a:ln/>
-        </p:spPr>
-        <p:txBody>
-          <a:bodyPr wrap="square" lIns="0" tIns="0" rIns="0" bIns="0" rtlCol="0" anchor="t"/>
-          <a:lstStyle/>
-          <a:p>
-            <a:pPr algn="l" indent="0" marL="0">
-              <a:buNone/>
-            </a:pPr>
-            <a:r>
-              <a:rPr lang="en-US" sz="2400" b="1" dirty="0" spc="-9" kern="0">
-                <a:solidFill>
-                  <a:srgbClr val="14161C"/>
-                </a:solidFill>
-                <a:latin typeface="Be Vietnam Pro" pitchFamily="34" charset="0"/>
-                <a:ea typeface="Be Vietnam Pro" pitchFamily="34" charset="-122"/>
-                <a:cs typeface="Be Vietnam Pro" pitchFamily="34" charset="-120"/>
-              </a:rPr>
-              <a:t>Ghép</a:t>
-            </a:r>
-            <a:r>
-              <a:rPr lang="en-US" sz="2400" b="1" dirty="0" spc="-1" kern="0">
-                <a:solidFill>
-                  <a:srgbClr val="14161C"/>
-                </a:solidFill>
-                <a:latin typeface="Be Vietnam Pro" pitchFamily="34" charset="0"/>
-                <a:ea typeface="Be Vietnam Pro" pitchFamily="34" charset="-122"/>
-                <a:cs typeface="Be Vietnam Pro" pitchFamily="34" charset="-120"/>
-              </a:rPr>
-              <a:t> lớp</a:t>
-            </a:r>
-            <a:endParaRPr lang="en-US" sz="2400" dirty="0"/>
-          </a:p>
-        </p:txBody>
-      </p:sp>
-      <p:sp>
-        <p:nvSpPr>
-          <p:cNvPr id="27" name="Text 25"/>
-          <p:cNvSpPr/>
-          <p:nvPr/>
-        </p:nvSpPr>
-        <p:spPr>
-          <a:xfrm>
-            <a:off x="15087600" y="5619750"/>
-            <a:ext cx="2114550" cy="1047750"/>
-          </a:xfrm>
-          <a:prstGeom prst="rect">
-            <a:avLst/>
-          </a:prstGeom>
-          <a:noFill/>
-          <a:ln/>
-        </p:spPr>
-        <p:txBody>
-          <a:bodyPr wrap="square" lIns="0" tIns="10525" rIns="0" bIns="-10525" rtlCol="0" anchor="t"/>
-          <a:lstStyle/>
-          <a:p>
-            <a:pPr algn="l" indent="0" marL="0">
-              <a:lnSpc>
-                <a:spcPts val="2535"/>
-              </a:lnSpc>
-              <a:buNone/>
-            </a:pPr>
-            <a:r>
-              <a:rPr lang="en-US" sz="1950" dirty="0" spc="-1" kern="0">
-                <a:solidFill>
-                  <a:srgbClr val="3B3A37"/>
-                </a:solidFill>
-                <a:latin typeface="Be Vietnam Pro" pitchFamily="34" charset="0"/>
-                <a:ea typeface="Be Vietnam Pro" pitchFamily="34" charset="-122"/>
-                <a:cs typeface="Be Vietnam Pro" pitchFamily="34" charset="-120"/>
-              </a:rPr>
-              <a:t>Đôi</a:t>
-            </a:r>
-            <a:r>
-              <a:rPr lang="en-US" sz="1950" dirty="0" spc="0" kern="0">
-                <a:solidFill>
-                  <a:srgbClr val="3B3A37"/>
-                </a:solidFill>
-                <a:latin typeface="Be Vietnam Pro" pitchFamily="34" charset="0"/>
-                <a:ea typeface="Be Vietnam Pro" pitchFamily="34" charset="-122"/>
-                <a:cs typeface="Be Vietnam Pro" pitchFamily="34" charset="-120"/>
-              </a:rPr>
-              <a:t> khi,</a:t>
-            </a:r>
-            <a:r>
-              <a:rPr lang="en-US" sz="1950" dirty="0" spc="-2" kern="0">
-                <a:solidFill>
-                  <a:srgbClr val="3B3A37"/>
-                </a:solidFill>
-                <a:latin typeface="Be Vietnam Pro" pitchFamily="34" charset="0"/>
-                <a:ea typeface="Be Vietnam Pro" pitchFamily="34" charset="-122"/>
-                <a:cs typeface="Be Vietnam Pro" pitchFamily="34" charset="-120"/>
-              </a:rPr>
-              <a:t> bằng</a:t>
-            </a:r>
-            <a:r>
-              <a:rPr lang="en-US" sz="1950" dirty="0" spc="2" kern="0">
-                <a:solidFill>
-                  <a:srgbClr val="3B3A37"/>
-                </a:solidFill>
-                <a:latin typeface="Be Vietnam Pro" pitchFamily="34" charset="0"/>
-                <a:ea typeface="Be Vietnam Pro" pitchFamily="34" charset="-122"/>
-                <a:cs typeface="Be Vietnam Pro" pitchFamily="34" charset="-120"/>
-              </a:rPr>
-              <a:t> GPU</a:t>
-            </a:r>
-            <a:endParaRPr lang="en-US" sz="1950" dirty="0"/>
-          </a:p>
-        </p:txBody>
-      </p:sp>
-      <p:sp>
-        <p:nvSpPr>
-          <p:cNvPr id="28" name="Shape 26"/>
-          <p:cNvSpPr/>
-          <p:nvPr/>
-        </p:nvSpPr>
-        <p:spPr>
-          <a:xfrm>
-            <a:off x="914400" y="7334250"/>
-            <a:ext cx="16459200" cy="1143000"/>
-          </a:xfrm>
-          <a:prstGeom prst="roundRect">
-            <a:avLst>
-              <a:gd name="adj" fmla="val 41667"/>
-            </a:avLst>
-          </a:prstGeom>
-          <a:solidFill>
-            <a:srgbClr val="14161C"/>
-          </a:solidFill>
-          <a:ln/>
-        </p:spPr>
-      </p:sp>
-      <p:sp>
-        <p:nvSpPr>
-          <p:cNvPr id="29" name="Text 27"/>
-          <p:cNvSpPr/>
-          <p:nvPr/>
-        </p:nvSpPr>
-        <p:spPr>
-          <a:xfrm>
-            <a:off x="1428750" y="7334250"/>
-            <a:ext cx="15430500" cy="1143000"/>
-          </a:xfrm>
-          <a:prstGeom prst="rect">
-            <a:avLst/>
-          </a:prstGeom>
-          <a:noFill/>
-          <a:ln/>
-        </p:spPr>
-        <p:txBody>
-          <a:bodyPr wrap="square" lIns="0" tIns="12954" rIns="0" bIns="-12954" rtlCol="0" anchor="ctr"/>
-          <a:lstStyle/>
-          <a:p>
-            <a:pPr algn="l" indent="0" marL="0">
-              <a:lnSpc>
-                <a:spcPts val="3120"/>
-              </a:lnSpc>
-              <a:buNone/>
-            </a:pPr>
-            <a:r>
-              <a:rPr lang="en-US" sz="2400" b="1" dirty="0" spc="-3" kern="0">
-                <a:solidFill>
-                  <a:srgbClr val="F3EEE3"/>
-                </a:solidFill>
-                <a:latin typeface="Be Vietnam Pro" pitchFamily="34" charset="0"/>
-                <a:ea typeface="Be Vietnam Pro" pitchFamily="34" charset="-122"/>
-                <a:cs typeface="Be Vietnam Pro" pitchFamily="34" charset="-120"/>
-              </a:rPr>
-              <a:t>Hiểu</a:t>
-            </a:r>
-            <a:r>
-              <a:rPr lang="en-US" sz="2400" b="1" dirty="0" spc="-1" kern="0">
-                <a:solidFill>
-                  <a:srgbClr val="F3EEE3"/>
-                </a:solidFill>
-                <a:latin typeface="Be Vietnam Pro" pitchFamily="34" charset="0"/>
-                <a:ea typeface="Be Vietnam Pro" pitchFamily="34" charset="-122"/>
-                <a:cs typeface="Be Vietnam Pro" pitchFamily="34" charset="-120"/>
-              </a:rPr>
-              <a:t> chuỗi</a:t>
-            </a:r>
-            <a:r>
-              <a:rPr lang="en-US" sz="2400" b="1" dirty="0" spc="-11" kern="0">
-                <a:solidFill>
-                  <a:srgbClr val="F3EEE3"/>
-                </a:solidFill>
-                <a:latin typeface="Be Vietnam Pro" pitchFamily="34" charset="0"/>
-                <a:ea typeface="Be Vietnam Pro" pitchFamily="34" charset="-122"/>
-                <a:cs typeface="Be Vietnam Pro" pitchFamily="34" charset="-120"/>
-              </a:rPr>
-              <a:t> này</a:t>
-            </a:r>
-            <a:r>
-              <a:rPr lang="en-US" sz="2400" b="1" dirty="0" spc="1" kern="0">
-                <a:solidFill>
-                  <a:srgbClr val="F3EEE3"/>
-                </a:solidFill>
-                <a:latin typeface="Be Vietnam Pro" pitchFamily="34" charset="0"/>
-                <a:ea typeface="Be Vietnam Pro" pitchFamily="34" charset="-122"/>
-                <a:cs typeface="Be Vietnam Pro" pitchFamily="34" charset="-120"/>
-              </a:rPr>
-              <a:t> giúp</a:t>
-            </a:r>
-            <a:r>
-              <a:rPr lang="en-US" sz="2400" b="1" dirty="0" spc="-5" kern="0">
-                <a:solidFill>
-                  <a:srgbClr val="F3EEE3"/>
-                </a:solidFill>
-                <a:latin typeface="Be Vietnam Pro" pitchFamily="34" charset="0"/>
-                <a:ea typeface="Be Vietnam Pro" pitchFamily="34" charset="-122"/>
-                <a:cs typeface="Be Vietnam Pro" pitchFamily="34" charset="-120"/>
-              </a:rPr>
-              <a:t> biết</a:t>
-            </a:r>
-            <a:r>
-              <a:rPr lang="en-US" sz="2400" b="1" dirty="0" spc="0" kern="0">
-                <a:solidFill>
-                  <a:srgbClr val="F3EEE3"/>
-                </a:solidFill>
-                <a:latin typeface="Be Vietnam Pro" pitchFamily="34" charset="0"/>
-                <a:ea typeface="Be Vietnam Pro" pitchFamily="34" charset="-122"/>
-                <a:cs typeface="Be Vietnam Pro" pitchFamily="34" charset="-120"/>
-              </a:rPr>
-              <a:t> vì</a:t>
-            </a:r>
-            <a:r>
-              <a:rPr lang="en-US" sz="2400" b="1" dirty="0" spc="4" kern="0">
-                <a:solidFill>
-                  <a:srgbClr val="F3EEE3"/>
-                </a:solidFill>
-                <a:latin typeface="Be Vietnam Pro" pitchFamily="34" charset="0"/>
-                <a:ea typeface="Be Vietnam Pro" pitchFamily="34" charset="-122"/>
-                <a:cs typeface="Be Vietnam Pro" pitchFamily="34" charset="-120"/>
-              </a:rPr>
-              <a:t> sao</a:t>
-            </a:r>
-            <a:r>
-              <a:rPr lang="en-US" sz="2400" b="1" dirty="0" spc="-7" kern="0">
-                <a:solidFill>
-                  <a:srgbClr val="F3EEE3"/>
-                </a:solidFill>
-                <a:latin typeface="Be Vietnam Pro" pitchFamily="34" charset="0"/>
-                <a:ea typeface="Be Vietnam Pro" pitchFamily="34" charset="-122"/>
-                <a:cs typeface="Be Vietnam Pro" pitchFamily="34" charset="-120"/>
-              </a:rPr>
-              <a:t> một</a:t>
-            </a:r>
-            <a:r>
-              <a:rPr lang="en-US" sz="2400" b="1" dirty="0" spc="-9" kern="0">
-                <a:solidFill>
-                  <a:srgbClr val="F3EEE3"/>
-                </a:solidFill>
-                <a:latin typeface="Be Vietnam Pro" pitchFamily="34" charset="0"/>
-                <a:ea typeface="Be Vietnam Pro" pitchFamily="34" charset="-122"/>
-                <a:cs typeface="Be Vietnam Pro" pitchFamily="34" charset="-120"/>
-              </a:rPr>
-              <a:t> dòng</a:t>
-            </a:r>
-            <a:r>
-              <a:rPr lang="en-US" sz="2400" b="1" dirty="0" spc="7" kern="0">
-                <a:solidFill>
-                  <a:srgbClr val="F3EEE3"/>
-                </a:solidFill>
-                <a:latin typeface="Be Vietnam Pro" pitchFamily="34" charset="0"/>
-                <a:ea typeface="Be Vietnam Pro" pitchFamily="34" charset="-122"/>
-                <a:cs typeface="Be Vietnam Pro" pitchFamily="34" charset="-120"/>
-              </a:rPr>
-              <a:t> CSS</a:t>
-            </a:r>
-            <a:r>
-              <a:rPr lang="en-US" sz="2400" b="1" dirty="0" spc="-12" kern="0">
-                <a:solidFill>
-                  <a:srgbClr val="F3EEE3"/>
-                </a:solidFill>
-                <a:latin typeface="Be Vietnam Pro" pitchFamily="34" charset="0"/>
-                <a:ea typeface="Be Vietnam Pro" pitchFamily="34" charset="-122"/>
-                <a:cs typeface="Be Vietnam Pro" pitchFamily="34" charset="-120"/>
-              </a:rPr>
-              <a:t> hay</a:t>
-            </a:r>
-            <a:r>
-              <a:rPr lang="en-US" sz="2400" b="1" dirty="0" spc="-7" kern="0">
-                <a:solidFill>
-                  <a:srgbClr val="F3EEE3"/>
-                </a:solidFill>
-                <a:latin typeface="Be Vietnam Pro" pitchFamily="34" charset="0"/>
-                <a:ea typeface="Be Vietnam Pro" pitchFamily="34" charset="-122"/>
-                <a:cs typeface="Be Vietnam Pro" pitchFamily="34" charset="-120"/>
-              </a:rPr>
-              <a:t> một</a:t>
-            </a:r>
-            <a:r>
-              <a:rPr lang="en-US" sz="2400" b="1" dirty="0" spc="-5" kern="0">
-                <a:solidFill>
-                  <a:srgbClr val="F3EEE3"/>
-                </a:solidFill>
-                <a:latin typeface="Be Vietnam Pro" pitchFamily="34" charset="0"/>
-                <a:ea typeface="Be Vietnam Pro" pitchFamily="34" charset="-122"/>
-                <a:cs typeface="Be Vietnam Pro" pitchFamily="34" charset="-120"/>
-              </a:rPr>
-              <a:t> thẻ</a:t>
-            </a:r>
-            <a:r>
-              <a:rPr lang="en-US" sz="2400" b="1" dirty="0" spc="1" kern="0">
-                <a:solidFill>
-                  <a:srgbClr val="F3EEE3"/>
-                </a:solidFill>
-                <a:latin typeface="Be Vietnam Pro" pitchFamily="34" charset="0"/>
-                <a:ea typeface="Be Vietnam Pro" pitchFamily="34" charset="-122"/>
-                <a:cs typeface="Be Vietnam Pro" pitchFamily="34" charset="-120"/>
-              </a:rPr>
-              <a:t> script</a:t>
-            </a:r>
-            <a:r>
-              <a:rPr lang="en-US" sz="2400" b="1" dirty="0" spc="-3" kern="0">
-                <a:solidFill>
-                  <a:srgbClr val="F3EEE3"/>
-                </a:solidFill>
-                <a:latin typeface="Be Vietnam Pro" pitchFamily="34" charset="0"/>
-                <a:ea typeface="Be Vietnam Pro" pitchFamily="34" charset="-122"/>
-                <a:cs typeface="Be Vietnam Pro" pitchFamily="34" charset="-120"/>
-              </a:rPr>
-              <a:t> có</a:t>
-            </a:r>
-            <a:r>
-              <a:rPr lang="en-US" sz="2400" b="1" dirty="0" spc="-5" kern="0">
-                <a:solidFill>
-                  <a:srgbClr val="F3EEE3"/>
-                </a:solidFill>
-                <a:latin typeface="Be Vietnam Pro" pitchFamily="34" charset="0"/>
-                <a:ea typeface="Be Vietnam Pro" pitchFamily="34" charset="-122"/>
-                <a:cs typeface="Be Vietnam Pro" pitchFamily="34" charset="-120"/>
-              </a:rPr>
-              <a:t> thể</a:t>
-            </a:r>
-            <a:r>
-              <a:rPr lang="en-US" sz="2400" b="1" dirty="0" spc="1" kern="0">
-                <a:solidFill>
-                  <a:srgbClr val="F3EEE3"/>
-                </a:solidFill>
-                <a:latin typeface="Be Vietnam Pro" pitchFamily="34" charset="0"/>
-                <a:ea typeface="Be Vietnam Pro" pitchFamily="34" charset="-122"/>
-                <a:cs typeface="Be Vietnam Pro" pitchFamily="34" charset="-120"/>
-              </a:rPr>
-              <a:t> làm</a:t>
-            </a:r>
-            <a:r>
-              <a:rPr lang="en-US" sz="2400" b="1" dirty="0" spc="-10" kern="0">
-                <a:solidFill>
-                  <a:srgbClr val="F3EEE3"/>
-                </a:solidFill>
-                <a:latin typeface="Be Vietnam Pro" pitchFamily="34" charset="0"/>
-                <a:ea typeface="Be Vietnam Pro" pitchFamily="34" charset="-122"/>
-                <a:cs typeface="Be Vietnam Pro" pitchFamily="34" charset="-120"/>
-              </a:rPr>
-              <a:t> trang</a:t>
-            </a:r>
-            <a:r>
-              <a:rPr lang="en-US" sz="2400" b="1" dirty="0" spc="-4" kern="0">
-                <a:solidFill>
-                  <a:srgbClr val="F3EEE3"/>
-                </a:solidFill>
-                <a:latin typeface="Be Vietnam Pro" pitchFamily="34" charset="0"/>
-                <a:ea typeface="Be Vietnam Pro" pitchFamily="34" charset="-122"/>
-                <a:cs typeface="Be Vietnam Pro" pitchFamily="34" charset="-120"/>
-              </a:rPr>
-              <a:t> hiện</a:t>
-            </a:r>
-            <a:r>
-              <a:rPr lang="en-US" sz="2400" b="1" dirty="0" spc="-1" kern="0">
-                <a:solidFill>
-                  <a:srgbClr val="F3EEE3"/>
-                </a:solidFill>
-                <a:latin typeface="Be Vietnam Pro" pitchFamily="34" charset="0"/>
-                <a:ea typeface="Be Vietnam Pro" pitchFamily="34" charset="-122"/>
-                <a:cs typeface="Be Vietnam Pro" pitchFamily="34" charset="-120"/>
-              </a:rPr>
-              <a:t> chậm.</a:t>
-            </a:r>
-            <a:endParaRPr lang="en-US" sz="2400" dirty="0"/>
-          </a:p>
-        </p:txBody>
-      </p:sp>
-      <p:sp>
-        <p:nvSpPr>
-          <p:cNvPr id="30" name="Connector line-1792293391222-114847299"/>
+          <p:cNvPr id="2" name="Connector line-1792293391222-114847299"/>
           <p:cNvSpPr/>
           <p:nvPr/>
         </p:nvSpPr>
@@ -18333,7 +16855,7 @@
       </p:sp>
       <p:sp>
         <p:nvSpPr>
-          <p:cNvPr id="31" name="Shape 29"/>
+          <p:cNvPr id="3" name="Shape 1"/>
           <p:cNvSpPr/>
           <p:nvPr/>
         </p:nvSpPr>
@@ -18358,7 +16880,7 @@
       </p:sp>
       <p:sp>
         <p:nvSpPr>
-          <p:cNvPr id="32" name="Shape 30"/>
+          <p:cNvPr id="4" name="Shape 2"/>
           <p:cNvSpPr/>
           <p:nvPr/>
         </p:nvSpPr>
@@ -18383,7 +16905,7 @@
       </p:sp>
       <p:sp>
         <p:nvSpPr>
-          <p:cNvPr id="33" name="Shape 31"/>
+          <p:cNvPr id="5" name="Shape 3"/>
           <p:cNvSpPr/>
           <p:nvPr/>
         </p:nvSpPr>
@@ -18408,7 +16930,7 @@
       </p:sp>
       <p:sp>
         <p:nvSpPr>
-          <p:cNvPr id="34" name="Shape 32"/>
+          <p:cNvPr id="6" name="Shape 4"/>
           <p:cNvSpPr/>
           <p:nvPr/>
         </p:nvSpPr>
@@ -18433,7 +16955,7 @@
       </p:sp>
       <p:sp>
         <p:nvSpPr>
-          <p:cNvPr id="35" name="Shape 33"/>
+          <p:cNvPr id="7" name="Shape 5"/>
           <p:cNvSpPr/>
           <p:nvPr/>
         </p:nvSpPr>
@@ -18458,7 +16980,7 @@
       </p:sp>
       <p:sp>
         <p:nvSpPr>
-          <p:cNvPr id="36" name="Shape 34"/>
+          <p:cNvPr id="8" name="Shape 6"/>
           <p:cNvSpPr/>
           <p:nvPr/>
         </p:nvSpPr>
@@ -18483,7 +17005,7 @@
       </p:sp>
       <p:sp>
         <p:nvSpPr>
-          <p:cNvPr id="37" name="Shape 35"/>
+          <p:cNvPr id="9" name="Shape 7"/>
           <p:cNvSpPr/>
           <p:nvPr/>
         </p:nvSpPr>
@@ -18508,7 +17030,7 @@
       </p:sp>
       <p:sp>
         <p:nvSpPr>
-          <p:cNvPr id="38" name="Shape 36"/>
+          <p:cNvPr id="10" name="Shape 8"/>
           <p:cNvSpPr/>
           <p:nvPr/>
         </p:nvSpPr>
@@ -18533,7 +17055,7 @@
       </p:sp>
       <p:sp>
         <p:nvSpPr>
-          <p:cNvPr id="39" name="Shape 37"/>
+          <p:cNvPr id="11" name="Shape 9"/>
           <p:cNvSpPr/>
           <p:nvPr/>
         </p:nvSpPr>
@@ -18558,7 +17080,7 @@
       </p:sp>
       <p:sp>
         <p:nvSpPr>
-          <p:cNvPr id="40" name="Shape 38"/>
+          <p:cNvPr id="12" name="Shape 10"/>
           <p:cNvSpPr/>
           <p:nvPr/>
         </p:nvSpPr>
@@ -18583,7 +17105,7 @@
       </p:sp>
       <p:sp>
         <p:nvSpPr>
-          <p:cNvPr id="41" name="Shape 39"/>
+          <p:cNvPr id="13" name="Shape 11"/>
           <p:cNvSpPr/>
           <p:nvPr/>
         </p:nvSpPr>
@@ -18603,7 +17125,7 @@
       </p:sp>
       <p:sp>
         <p:nvSpPr>
-          <p:cNvPr id="42" name="Text 40"/>
+          <p:cNvPr id="14" name="Text 12"/>
           <p:cNvSpPr/>
           <p:nvPr/>
         </p:nvSpPr>
@@ -18708,7 +17230,938 @@
       </p:sp>
       <p:sp>
         <p:nvSpPr>
-          <p:cNvPr id="43" name="Shape 41"/>
+          <p:cNvPr id="15" name="Text 13"/>
+          <p:cNvSpPr/>
+          <p:nvPr/>
+        </p:nvSpPr>
+        <p:spPr>
+          <a:xfrm>
+            <a:off x="914400" y="952500"/>
+            <a:ext cx="8572500" cy="323850"/>
+          </a:xfrm>
+          <a:prstGeom prst="rect">
+            <a:avLst/>
+          </a:prstGeom>
+          <a:noFill/>
+          <a:ln/>
+        </p:spPr>
+        <p:txBody>
+          <a:bodyPr wrap="square" lIns="0" tIns="0" rIns="0" bIns="0" rtlCol="0" anchor="t"/>
+          <a:lstStyle/>
+          <a:p>
+            <a:pPr algn="l" indent="0" marL="0">
+              <a:buNone/>
+            </a:pPr>
+            <a:r>
+              <a:rPr lang="en-US" sz="1800" b="1" spc="300" kern="0" dirty="0">
+                <a:solidFill>
+                  <a:srgbClr val="0F766E"/>
+                </a:solidFill>
+                <a:latin typeface="Be Vietnam Pro" pitchFamily="34" charset="0"/>
+                <a:ea typeface="Be Vietnam Pro" pitchFamily="34" charset="-122"/>
+                <a:cs typeface="Be Vietnam Pro" pitchFamily="34" charset="-120"/>
+              </a:rPr>
+              <a:t>NHÌN</a:t>
+            </a:r>
+            <a:r>
+              <a:rPr lang="en-US" sz="1800" b="1" spc="302" kern="0" dirty="0">
+                <a:solidFill>
+                  <a:srgbClr val="0F766E"/>
+                </a:solidFill>
+                <a:latin typeface="Be Vietnam Pro" pitchFamily="34" charset="0"/>
+                <a:ea typeface="Be Vietnam Pro" pitchFamily="34" charset="-122"/>
+                <a:cs typeface="Be Vietnam Pro" pitchFamily="34" charset="-120"/>
+              </a:rPr>
+              <a:t> HÌNH</a:t>
+            </a:r>
+            <a:r>
+              <a:rPr lang="en-US" sz="1800" b="1" spc="297" kern="0" dirty="0">
+                <a:solidFill>
+                  <a:srgbClr val="0F766E"/>
+                </a:solidFill>
+                <a:latin typeface="Be Vietnam Pro" pitchFamily="34" charset="0"/>
+                <a:ea typeface="Be Vietnam Pro" pitchFamily="34" charset="-122"/>
+                <a:cs typeface="Be Vietnam Pro" pitchFamily="34" charset="-120"/>
+              </a:rPr>
+              <a:t> TRẢ</a:t>
+            </a:r>
+            <a:r>
+              <a:rPr lang="en-US" sz="1800" b="1" spc="279" kern="0" dirty="0">
+                <a:solidFill>
+                  <a:srgbClr val="0F766E"/>
+                </a:solidFill>
+                <a:latin typeface="Be Vietnam Pro" pitchFamily="34" charset="0"/>
+                <a:ea typeface="Be Vietnam Pro" pitchFamily="34" charset="-122"/>
+                <a:cs typeface="Be Vietnam Pro" pitchFamily="34" charset="-120"/>
+              </a:rPr>
+              <a:t> LỜI</a:t>
+            </a:r>
+            <a:endParaRPr lang="en-US" sz="1800" dirty="0"/>
+          </a:p>
+        </p:txBody>
+      </p:sp>
+      <p:sp>
+        <p:nvSpPr>
+          <p:cNvPr id="16" name="Text 14"/>
+          <p:cNvSpPr/>
+          <p:nvPr/>
+        </p:nvSpPr>
+        <p:spPr>
+          <a:xfrm>
+            <a:off x="914400" y="1428750"/>
+            <a:ext cx="16459200" cy="1428750"/>
+          </a:xfrm>
+          <a:prstGeom prst="rect">
+            <a:avLst/>
+          </a:prstGeom>
+          <a:noFill/>
+          <a:ln/>
+        </p:spPr>
+        <p:txBody>
+          <a:bodyPr wrap="square" lIns="0" tIns="36576" rIns="0" bIns="-36576" rtlCol="0" anchor="t"/>
+          <a:lstStyle/>
+          <a:p>
+            <a:pPr algn="l" indent="0" marL="0">
+              <a:lnSpc>
+                <a:spcPts val="5184"/>
+              </a:lnSpc>
+              <a:buNone/>
+            </a:pPr>
+            <a:r>
+              <a:rPr lang="en-US" sz="4800" dirty="0" spc="-4" kern="0">
+                <a:solidFill>
+                  <a:srgbClr val="14161C"/>
+                </a:solidFill>
+                <a:latin typeface="Bricolage Grotesque ExtraBold" pitchFamily="34" charset="0"/>
+                <a:ea typeface="Bricolage Grotesque ExtraBold" pitchFamily="34" charset="-122"/>
+                <a:cs typeface="Bricolage Grotesque ExtraBold" pitchFamily="34" charset="-120"/>
+              </a:rPr>
+              <a:t>Hai</a:t>
+            </a:r>
+            <a:r>
+              <a:rPr lang="en-US" sz="4800" dirty="0" spc="0" kern="0">
+                <a:solidFill>
+                  <a:srgbClr val="14161C"/>
+                </a:solidFill>
+                <a:latin typeface="Bricolage Grotesque ExtraBold" pitchFamily="34" charset="0"/>
+                <a:ea typeface="Bricolage Grotesque ExtraBold" pitchFamily="34" charset="-122"/>
+                <a:cs typeface="Bricolage Grotesque ExtraBold" pitchFamily="34" charset="-120"/>
+              </a:rPr>
+              <a:t> phần</a:t>
+            </a:r>
+            <a:r>
+              <a:rPr lang="en-US" sz="4800" dirty="0" spc="-32" kern="0">
+                <a:solidFill>
+                  <a:srgbClr val="14161C"/>
+                </a:solidFill>
+                <a:latin typeface="Bricolage Grotesque ExtraBold" pitchFamily="34" charset="0"/>
+                <a:ea typeface="Bricolage Grotesque ExtraBold" pitchFamily="34" charset="-122"/>
+                <a:cs typeface="Bricolage Grotesque ExtraBold" pitchFamily="34" charset="-120"/>
+              </a:rPr>
+              <a:t> tử,</a:t>
+            </a:r>
+            <a:r>
+              <a:rPr lang="en-US" sz="4800" dirty="0" spc="-6" kern="0">
+                <a:solidFill>
+                  <a:srgbClr val="14161C"/>
+                </a:solidFill>
+                <a:latin typeface="Bricolage Grotesque ExtraBold" pitchFamily="34" charset="0"/>
+                <a:ea typeface="Bricolage Grotesque ExtraBold" pitchFamily="34" charset="-122"/>
+                <a:cs typeface="Bricolage Grotesque ExtraBold" pitchFamily="34" charset="-120"/>
+              </a:rPr>
+              <a:t> một</a:t>
+            </a:r>
+            <a:r>
+              <a:rPr lang="en-US" sz="4800" dirty="0" spc="-1" kern="0">
+                <a:solidFill>
+                  <a:srgbClr val="14161C"/>
+                </a:solidFill>
+                <a:latin typeface="Bricolage Grotesque ExtraBold" pitchFamily="34" charset="0"/>
+                <a:ea typeface="Bricolage Grotesque ExtraBold" pitchFamily="34" charset="-122"/>
+                <a:cs typeface="Bricolage Grotesque ExtraBold" pitchFamily="34" charset="-120"/>
+              </a:rPr>
+              <a:t> có</a:t>
+            </a:r>
+            <a:r>
+              <a:rPr lang="en-US" sz="4800" dirty="0" spc="1" kern="0">
+                <a:solidFill>
+                  <a:srgbClr val="14161C"/>
+                </a:solidFill>
+                <a:latin typeface="Bricolage Grotesque ExtraBold" pitchFamily="34" charset="0"/>
+                <a:ea typeface="Bricolage Grotesque ExtraBold" pitchFamily="34" charset="-122"/>
+                <a:cs typeface="Bricolage Grotesque ExtraBold" pitchFamily="34" charset="-120"/>
+              </a:rPr>
+              <a:t> display:</a:t>
+            </a:r>
+            <a:r>
+              <a:rPr lang="en-US" sz="4800" dirty="0" spc="-5" kern="0">
+                <a:solidFill>
+                  <a:srgbClr val="14161C"/>
+                </a:solidFill>
+                <a:latin typeface="Bricolage Grotesque ExtraBold" pitchFamily="34" charset="0"/>
+                <a:ea typeface="Bricolage Grotesque ExtraBold" pitchFamily="34" charset="-122"/>
+                <a:cs typeface="Bricolage Grotesque ExtraBold" pitchFamily="34" charset="-120"/>
+              </a:rPr>
+              <a:t> none,</a:t>
+            </a:r>
+            <a:r>
+              <a:rPr lang="en-US" sz="4800" dirty="0" spc="-6" kern="0">
+                <a:solidFill>
+                  <a:srgbClr val="14161C"/>
+                </a:solidFill>
+                <a:latin typeface="Bricolage Grotesque ExtraBold" pitchFamily="34" charset="0"/>
+                <a:ea typeface="Bricolage Grotesque ExtraBold" pitchFamily="34" charset="-122"/>
+                <a:cs typeface="Bricolage Grotesque ExtraBold" pitchFamily="34" charset="-120"/>
+              </a:rPr>
+              <a:t> một</a:t>
+            </a:r>
+            <a:r>
+              <a:rPr lang="en-US" sz="4800" dirty="0" spc="-2" kern="0">
+                <a:solidFill>
+                  <a:srgbClr val="14161C"/>
+                </a:solidFill>
+                <a:latin typeface="Bricolage Grotesque ExtraBold" pitchFamily="34" charset="0"/>
+                <a:ea typeface="Bricolage Grotesque ExtraBold" pitchFamily="34" charset="-122"/>
+                <a:cs typeface="Bricolage Grotesque ExtraBold" pitchFamily="34" charset="-120"/>
+              </a:rPr>
+              <a:t> có</a:t>
+            </a:r>
+            <a:r>
+              <a:rPr lang="en-US" sz="4800" dirty="0" spc="0" kern="0">
+                <a:solidFill>
+                  <a:srgbClr val="14161C"/>
+                </a:solidFill>
+                <a:latin typeface="Bricolage Grotesque ExtraBold" pitchFamily="34" charset="0"/>
+                <a:ea typeface="Bricolage Grotesque ExtraBold" pitchFamily="34" charset="-122"/>
+                <a:cs typeface="Bricolage Grotesque ExtraBold" pitchFamily="34" charset="-120"/>
+              </a:rPr>
+              <a:t> visibility:</a:t>
+            </a:r>
+            <a:r>
+              <a:rPr lang="en-US" sz="4800" dirty="0" spc="1" kern="0">
+                <a:solidFill>
+                  <a:srgbClr val="14161C"/>
+                </a:solidFill>
+                <a:latin typeface="Bricolage Grotesque ExtraBold" pitchFamily="34" charset="0"/>
+                <a:ea typeface="Bricolage Grotesque ExtraBold" pitchFamily="34" charset="-122"/>
+                <a:cs typeface="Bricolage Grotesque ExtraBold" pitchFamily="34" charset="-120"/>
+              </a:rPr>
+              <a:t> hidden.</a:t>
+            </a:r>
+            <a:r>
+              <a:rPr lang="en-US" sz="4800" dirty="0" spc="2" kern="0">
+                <a:solidFill>
+                  <a:srgbClr val="14161C"/>
+                </a:solidFill>
+                <a:latin typeface="Bricolage Grotesque ExtraBold" pitchFamily="34" charset="0"/>
+                <a:ea typeface="Bricolage Grotesque ExtraBold" pitchFamily="34" charset="-122"/>
+                <a:cs typeface="Bricolage Grotesque ExtraBold" pitchFamily="34" charset="-120"/>
+              </a:rPr>
+              <a:t> </a:t>
+            </a:r>
+            <a:pPr algn="l" indent="0" marL="0">
+              <a:lnSpc>
+                <a:spcPts val="5184"/>
+              </a:lnSpc>
+              <a:buNone/>
+            </a:pPr>
+            <a:r>
+              <a:rPr lang="en-US" sz="4800" dirty="0" spc="-3" kern="0">
+                <a:solidFill>
+                  <a:srgbClr val="0F766E"/>
+                </a:solidFill>
+                <a:latin typeface="Bricolage Grotesque ExtraBold" pitchFamily="34" charset="0"/>
+                <a:ea typeface="Bricolage Grotesque ExtraBold" pitchFamily="34" charset="-122"/>
+                <a:cs typeface="Bricolage Grotesque ExtraBold" pitchFamily="34" charset="-120"/>
+              </a:rPr>
+              <a:t>Phần</a:t>
+            </a:r>
+            <a:r>
+              <a:rPr lang="en-US" sz="4800" dirty="0" spc="4" kern="0">
+                <a:solidFill>
+                  <a:srgbClr val="0F766E"/>
+                </a:solidFill>
+                <a:latin typeface="Bricolage Grotesque ExtraBold" pitchFamily="34" charset="0"/>
+                <a:ea typeface="Bricolage Grotesque ExtraBold" pitchFamily="34" charset="-122"/>
+                <a:cs typeface="Bricolage Grotesque ExtraBold" pitchFamily="34" charset="-120"/>
+              </a:rPr>
+              <a:t> tử</a:t>
+            </a:r>
+            <a:r>
+              <a:rPr lang="en-US" sz="4800" dirty="0" spc="-2" kern="0">
+                <a:solidFill>
+                  <a:srgbClr val="0F766E"/>
+                </a:solidFill>
+                <a:latin typeface="Bricolage Grotesque ExtraBold" pitchFamily="34" charset="0"/>
+                <a:ea typeface="Bricolage Grotesque ExtraBold" pitchFamily="34" charset="-122"/>
+                <a:cs typeface="Bricolage Grotesque ExtraBold" pitchFamily="34" charset="-120"/>
+              </a:rPr>
+              <a:t> nào</a:t>
+            </a:r>
+            <a:r>
+              <a:rPr lang="en-US" sz="4800" dirty="0" spc="-1" kern="0">
+                <a:solidFill>
+                  <a:srgbClr val="0F766E"/>
+                </a:solidFill>
+                <a:latin typeface="Bricolage Grotesque ExtraBold" pitchFamily="34" charset="0"/>
+                <a:ea typeface="Bricolage Grotesque ExtraBold" pitchFamily="34" charset="-122"/>
+                <a:cs typeface="Bricolage Grotesque ExtraBold" pitchFamily="34" charset="-120"/>
+              </a:rPr>
+              <a:t> nằm</a:t>
+            </a:r>
+            <a:r>
+              <a:rPr lang="en-US" sz="4800" dirty="0" spc="-11" kern="0">
+                <a:solidFill>
+                  <a:srgbClr val="0F766E"/>
+                </a:solidFill>
+                <a:latin typeface="Bricolage Grotesque ExtraBold" pitchFamily="34" charset="0"/>
+                <a:ea typeface="Bricolage Grotesque ExtraBold" pitchFamily="34" charset="-122"/>
+                <a:cs typeface="Bricolage Grotesque ExtraBold" pitchFamily="34" charset="-120"/>
+              </a:rPr>
+              <a:t> trong</a:t>
+            </a:r>
+            <a:r>
+              <a:rPr lang="en-US" sz="4800" dirty="0" spc="-3" kern="0">
+                <a:solidFill>
+                  <a:srgbClr val="0F766E"/>
+                </a:solidFill>
+                <a:latin typeface="Bricolage Grotesque ExtraBold" pitchFamily="34" charset="0"/>
+                <a:ea typeface="Bricolage Grotesque ExtraBold" pitchFamily="34" charset="-122"/>
+                <a:cs typeface="Bricolage Grotesque ExtraBold" pitchFamily="34" charset="-120"/>
+              </a:rPr>
+              <a:t> render</a:t>
+            </a:r>
+            <a:r>
+              <a:rPr lang="en-US" sz="4800" dirty="0" spc="-13" kern="0">
+                <a:solidFill>
+                  <a:srgbClr val="0F766E"/>
+                </a:solidFill>
+                <a:latin typeface="Bricolage Grotesque ExtraBold" pitchFamily="34" charset="0"/>
+                <a:ea typeface="Bricolage Grotesque ExtraBold" pitchFamily="34" charset="-122"/>
+                <a:cs typeface="Bricolage Grotesque ExtraBold" pitchFamily="34" charset="-120"/>
+              </a:rPr>
+              <a:t> tree,</a:t>
+            </a:r>
+            <a:r>
+              <a:rPr lang="en-US" sz="4800" dirty="0" spc="-55" kern="0">
+                <a:solidFill>
+                  <a:srgbClr val="0F766E"/>
+                </a:solidFill>
+                <a:latin typeface="Bricolage Grotesque ExtraBold" pitchFamily="34" charset="0"/>
+                <a:ea typeface="Bricolage Grotesque ExtraBold" pitchFamily="34" charset="-122"/>
+                <a:cs typeface="Bricolage Grotesque ExtraBold" pitchFamily="34" charset="-120"/>
+              </a:rPr>
+              <a:t> và</a:t>
+            </a:r>
+            <a:r>
+              <a:rPr lang="en-US" sz="4800" dirty="0" spc="-27" kern="0">
+                <a:solidFill>
+                  <a:srgbClr val="0F766E"/>
+                </a:solidFill>
+                <a:latin typeface="Bricolage Grotesque ExtraBold" pitchFamily="34" charset="0"/>
+                <a:ea typeface="Bricolage Grotesque ExtraBold" pitchFamily="34" charset="-122"/>
+                <a:cs typeface="Bricolage Grotesque ExtraBold" pitchFamily="34" charset="-120"/>
+              </a:rPr>
+              <a:t> vì</a:t>
+            </a:r>
+            <a:r>
+              <a:rPr lang="en-US" sz="4800" dirty="0" spc="-31" kern="0">
+                <a:solidFill>
+                  <a:srgbClr val="0F766E"/>
+                </a:solidFill>
+                <a:latin typeface="Bricolage Grotesque ExtraBold" pitchFamily="34" charset="0"/>
+                <a:ea typeface="Bricolage Grotesque ExtraBold" pitchFamily="34" charset="-122"/>
+                <a:cs typeface="Bricolage Grotesque ExtraBold" pitchFamily="34" charset="-120"/>
+              </a:rPr>
+              <a:t> sao?</a:t>
+            </a:r>
+            <a:endParaRPr lang="en-US" sz="4800" dirty="0"/>
+          </a:p>
+        </p:txBody>
+      </p:sp>
+      <p:sp>
+        <p:nvSpPr>
+          <p:cNvPr id="17" name="Shape 15"/>
+          <p:cNvSpPr/>
+          <p:nvPr/>
+        </p:nvSpPr>
+        <p:spPr>
+          <a:xfrm>
+            <a:off x="914400" y="3810000"/>
+            <a:ext cx="7810500" cy="2095500"/>
+          </a:xfrm>
+          <a:prstGeom prst="roundRect">
+            <a:avLst>
+              <a:gd name="adj" fmla="val 12727"/>
+            </a:avLst>
+          </a:prstGeom>
+          <a:solidFill>
+            <a:srgbClr val="FBF8F2"/>
+          </a:solidFill>
+          <a:ln w="28575">
+            <a:solidFill>
+              <a:srgbClr val="DDD5C1"/>
+            </a:solidFill>
+            <a:prstDash val="solid"/>
+          </a:ln>
+        </p:spPr>
+      </p:sp>
+      <p:sp>
+        <p:nvSpPr>
+          <p:cNvPr id="18" name="Shape 16"/>
+          <p:cNvSpPr/>
+          <p:nvPr/>
+        </p:nvSpPr>
+        <p:spPr>
+          <a:xfrm>
+            <a:off x="9563100" y="3810000"/>
+            <a:ext cx="7810500" cy="2095500"/>
+          </a:xfrm>
+          <a:prstGeom prst="roundRect">
+            <a:avLst>
+              <a:gd name="adj" fmla="val 12727"/>
+            </a:avLst>
+          </a:prstGeom>
+          <a:solidFill>
+            <a:srgbClr val="FBF8F2"/>
+          </a:solidFill>
+          <a:ln w="28575">
+            <a:solidFill>
+              <a:srgbClr val="DDD5C1"/>
+            </a:solidFill>
+            <a:prstDash val="solid"/>
+          </a:ln>
+        </p:spPr>
+      </p:sp>
+      <p:sp>
+        <p:nvSpPr>
+          <p:cNvPr id="19" name="Text 17"/>
+          <p:cNvSpPr/>
+          <p:nvPr/>
+        </p:nvSpPr>
+        <p:spPr>
+          <a:xfrm>
+            <a:off x="1295400" y="4495800"/>
+            <a:ext cx="723900" cy="723900"/>
+          </a:xfrm>
+          <a:prstGeom prst="roundRect">
+            <a:avLst>
+              <a:gd name="adj" fmla="val 50000"/>
+            </a:avLst>
+          </a:prstGeom>
+          <a:solidFill>
+            <a:srgbClr val="14161C"/>
+          </a:solidFill>
+          <a:ln/>
+        </p:spPr>
+        <p:txBody>
+          <a:bodyPr wrap="square" lIns="0" tIns="0" rIns="0" bIns="0" rtlCol="0" anchor="ctr"/>
+          <a:lstStyle/>
+          <a:p>
+            <a:pPr algn="ctr" indent="0" marL="0">
+              <a:buNone/>
+            </a:pPr>
+            <a:r>
+              <a:rPr lang="en-US" sz="3300" dirty="0" kern="0">
+                <a:solidFill>
+                  <a:srgbClr val="F3EEE3"/>
+                </a:solidFill>
+                <a:latin typeface="Bricolage Grotesque ExtraBold" pitchFamily="34" charset="0"/>
+                <a:ea typeface="Bricolage Grotesque ExtraBold" pitchFamily="34" charset="-122"/>
+                <a:cs typeface="Bricolage Grotesque ExtraBold" pitchFamily="34" charset="-120"/>
+              </a:rPr>
+              <a:t>A</a:t>
+            </a:r>
+            <a:endParaRPr lang="en-US" sz="3300" dirty="0"/>
+          </a:p>
+        </p:txBody>
+      </p:sp>
+      <p:sp>
+        <p:nvSpPr>
+          <p:cNvPr id="20" name="Text 18"/>
+          <p:cNvSpPr/>
+          <p:nvPr/>
+        </p:nvSpPr>
+        <p:spPr>
+          <a:xfrm>
+            <a:off x="9944100" y="4495800"/>
+            <a:ext cx="723900" cy="723900"/>
+          </a:xfrm>
+          <a:prstGeom prst="roundRect">
+            <a:avLst>
+              <a:gd name="adj" fmla="val 50000"/>
+            </a:avLst>
+          </a:prstGeom>
+          <a:solidFill>
+            <a:srgbClr val="14161C"/>
+          </a:solidFill>
+          <a:ln/>
+        </p:spPr>
+        <p:txBody>
+          <a:bodyPr wrap="square" lIns="0" tIns="0" rIns="0" bIns="0" rtlCol="0" anchor="ctr"/>
+          <a:lstStyle/>
+          <a:p>
+            <a:pPr algn="ctr" indent="0" marL="0">
+              <a:buNone/>
+            </a:pPr>
+            <a:r>
+              <a:rPr lang="en-US" sz="3300" dirty="0" spc="-6" kern="0">
+                <a:solidFill>
+                  <a:srgbClr val="F3EEE3"/>
+                </a:solidFill>
+                <a:latin typeface="Bricolage Grotesque ExtraBold" pitchFamily="34" charset="0"/>
+                <a:ea typeface="Bricolage Grotesque ExtraBold" pitchFamily="34" charset="-122"/>
+                <a:cs typeface="Bricolage Grotesque ExtraBold" pitchFamily="34" charset="-120"/>
+              </a:rPr>
+              <a:t>B</a:t>
+            </a:r>
+            <a:endParaRPr lang="en-US" sz="3300" dirty="0"/>
+          </a:p>
+        </p:txBody>
+      </p:sp>
+      <p:sp>
+        <p:nvSpPr>
+          <p:cNvPr id="21" name="Text 19"/>
+          <p:cNvSpPr/>
+          <p:nvPr/>
+        </p:nvSpPr>
+        <p:spPr>
+          <a:xfrm>
+            <a:off x="2247900" y="4400550"/>
+            <a:ext cx="6096000" cy="914400"/>
+          </a:xfrm>
+          <a:prstGeom prst="rect">
+            <a:avLst/>
+          </a:prstGeom>
+          <a:noFill/>
+          <a:ln/>
+        </p:spPr>
+        <p:txBody>
+          <a:bodyPr wrap="square" lIns="0" tIns="0" rIns="0" bIns="0" rtlCol="0" anchor="ctr"/>
+          <a:lstStyle/>
+          <a:p>
+            <a:pPr algn="l" indent="0" marL="0">
+              <a:buNone/>
+            </a:pPr>
+            <a:r>
+              <a:rPr lang="en-US" sz="3900" dirty="0" spc="3" kern="0">
+                <a:solidFill>
+                  <a:srgbClr val="14161C"/>
+                </a:solidFill>
+                <a:latin typeface="Bricolage Grotesque ExtraBold" pitchFamily="34" charset="0"/>
+                <a:ea typeface="Bricolage Grotesque ExtraBold" pitchFamily="34" charset="-122"/>
+                <a:cs typeface="Bricolage Grotesque ExtraBold" pitchFamily="34" charset="-120"/>
+              </a:rPr>
+              <a:t>display:</a:t>
+            </a:r>
+            <a:r>
+              <a:rPr lang="en-US" sz="3900" dirty="0" spc="1" kern="0">
+                <a:solidFill>
+                  <a:srgbClr val="14161C"/>
+                </a:solidFill>
+                <a:latin typeface="Bricolage Grotesque ExtraBold" pitchFamily="34" charset="0"/>
+                <a:ea typeface="Bricolage Grotesque ExtraBold" pitchFamily="34" charset="-122"/>
+                <a:cs typeface="Bricolage Grotesque ExtraBold" pitchFamily="34" charset="-120"/>
+              </a:rPr>
+              <a:t> none</a:t>
+            </a:r>
+            <a:endParaRPr lang="en-US" sz="3900" dirty="0"/>
+          </a:p>
+        </p:txBody>
+      </p:sp>
+      <p:sp>
+        <p:nvSpPr>
+          <p:cNvPr id="22" name="Text 20"/>
+          <p:cNvSpPr/>
+          <p:nvPr/>
+        </p:nvSpPr>
+        <p:spPr>
+          <a:xfrm>
+            <a:off x="10896600" y="4400550"/>
+            <a:ext cx="6096000" cy="914400"/>
+          </a:xfrm>
+          <a:prstGeom prst="rect">
+            <a:avLst/>
+          </a:prstGeom>
+          <a:noFill/>
+          <a:ln/>
+        </p:spPr>
+        <p:txBody>
+          <a:bodyPr wrap="square" lIns="0" tIns="0" rIns="0" bIns="0" rtlCol="0" anchor="ctr"/>
+          <a:lstStyle/>
+          <a:p>
+            <a:pPr algn="l" indent="0" marL="0">
+              <a:buNone/>
+            </a:pPr>
+            <a:r>
+              <a:rPr lang="en-US" sz="3900" dirty="0" spc="1" kern="0">
+                <a:solidFill>
+                  <a:srgbClr val="14161C"/>
+                </a:solidFill>
+                <a:latin typeface="Bricolage Grotesque ExtraBold" pitchFamily="34" charset="0"/>
+                <a:ea typeface="Bricolage Grotesque ExtraBold" pitchFamily="34" charset="-122"/>
+                <a:cs typeface="Bricolage Grotesque ExtraBold" pitchFamily="34" charset="-120"/>
+              </a:rPr>
+              <a:t>visibility: hidden</a:t>
+            </a:r>
+            <a:endParaRPr lang="en-US" sz="3900" dirty="0"/>
+          </a:p>
+        </p:txBody>
+      </p:sp>
+      <p:sp>
+        <p:nvSpPr>
+          <p:cNvPr id="23" name="Shape 21"/>
+          <p:cNvSpPr/>
+          <p:nvPr/>
+        </p:nvSpPr>
+        <p:spPr>
+          <a:xfrm>
+            <a:off x="914400" y="6572250"/>
+            <a:ext cx="16459200" cy="2286000"/>
+          </a:xfrm>
+          <a:prstGeom prst="roundRect">
+            <a:avLst>
+              <a:gd name="adj" fmla="val 20000"/>
+            </a:avLst>
+          </a:prstGeom>
+          <a:solidFill>
+            <a:srgbClr val="14161C"/>
+          </a:solidFill>
+          <a:ln/>
+        </p:spPr>
+      </p:sp>
+      <p:sp>
+        <p:nvSpPr>
+          <p:cNvPr id="24" name="Text 22"/>
+          <p:cNvSpPr/>
+          <p:nvPr/>
+        </p:nvSpPr>
+        <p:spPr>
+          <a:xfrm>
+            <a:off x="1428750" y="6915150"/>
+            <a:ext cx="6667500" cy="285750"/>
+          </a:xfrm>
+          <a:prstGeom prst="rect">
+            <a:avLst/>
+          </a:prstGeom>
+          <a:noFill/>
+          <a:ln/>
+        </p:spPr>
+        <p:txBody>
+          <a:bodyPr wrap="square" lIns="0" tIns="0" rIns="0" bIns="0" rtlCol="0" anchor="t"/>
+          <a:lstStyle/>
+          <a:p>
+            <a:pPr algn="l" indent="0" marL="0">
+              <a:buNone/>
+            </a:pPr>
+            <a:r>
+              <a:rPr lang="en-US" sz="1650" b="1" spc="201" kern="0" dirty="0">
+                <a:solidFill>
+                  <a:srgbClr val="3DD6A0"/>
+                </a:solidFill>
+                <a:latin typeface="Be Vietnam Pro" pitchFamily="34" charset="0"/>
+                <a:ea typeface="Be Vietnam Pro" pitchFamily="34" charset="-122"/>
+                <a:cs typeface="Be Vietnam Pro" pitchFamily="34" charset="-120"/>
+              </a:rPr>
+              <a:t>ĐÁP</a:t>
+            </a:r>
+            <a:r>
+              <a:rPr lang="en-US" sz="1650" b="1" spc="224" kern="0" dirty="0">
+                <a:solidFill>
+                  <a:srgbClr val="3DD6A0"/>
+                </a:solidFill>
+                <a:latin typeface="Be Vietnam Pro" pitchFamily="34" charset="0"/>
+                <a:ea typeface="Be Vietnam Pro" pitchFamily="34" charset="-122"/>
+                <a:cs typeface="Be Vietnam Pro" pitchFamily="34" charset="-120"/>
+              </a:rPr>
+              <a:t> ÁN</a:t>
+            </a:r>
+            <a:endParaRPr lang="en-US" sz="1650" dirty="0"/>
+          </a:p>
+        </p:txBody>
+      </p:sp>
+      <p:sp>
+        <p:nvSpPr>
+          <p:cNvPr id="25" name="Text 23"/>
+          <p:cNvSpPr/>
+          <p:nvPr/>
+        </p:nvSpPr>
+        <p:spPr>
+          <a:xfrm>
+            <a:off x="1428750" y="7391400"/>
+            <a:ext cx="15430500" cy="1238250"/>
+          </a:xfrm>
+          <a:prstGeom prst="rect">
+            <a:avLst/>
+          </a:prstGeom>
+          <a:noFill/>
+          <a:ln/>
+        </p:spPr>
+        <p:txBody>
+          <a:bodyPr wrap="square" lIns="0" tIns="20955" rIns="0" bIns="-20955" rtlCol="0" anchor="t"/>
+          <a:lstStyle/>
+          <a:p>
+            <a:pPr algn="l" indent="0" marL="0">
+              <a:lnSpc>
+                <a:spcPts val="3750"/>
+              </a:lnSpc>
+              <a:buNone/>
+            </a:pPr>
+            <a:r>
+              <a:rPr lang="en-US" sz="3000" b="1" dirty="0" spc="-4" kern="0">
+                <a:solidFill>
+                  <a:srgbClr val="3DD6A0"/>
+                </a:solidFill>
+                <a:latin typeface="Be Vietnam Pro" pitchFamily="34" charset="0"/>
+                <a:ea typeface="Be Vietnam Pro" pitchFamily="34" charset="-122"/>
+                <a:cs typeface="Be Vietnam Pro" pitchFamily="34" charset="-120"/>
+              </a:rPr>
+              <a:t>Phần</a:t>
+            </a:r>
+            <a:r>
+              <a:rPr lang="en-US" sz="3000" b="1" dirty="0" spc="3" kern="0">
+                <a:solidFill>
+                  <a:srgbClr val="3DD6A0"/>
+                </a:solidFill>
+                <a:latin typeface="Be Vietnam Pro" pitchFamily="34" charset="0"/>
+                <a:ea typeface="Be Vietnam Pro" pitchFamily="34" charset="-122"/>
+                <a:cs typeface="Be Vietnam Pro" pitchFamily="34" charset="-120"/>
+              </a:rPr>
+              <a:t> tử</a:t>
+            </a:r>
+            <a:r>
+              <a:rPr lang="en-US" sz="3000" b="1" dirty="0" spc="0" kern="0">
+                <a:solidFill>
+                  <a:srgbClr val="3DD6A0"/>
+                </a:solidFill>
+                <a:latin typeface="Be Vietnam Pro" pitchFamily="34" charset="0"/>
+                <a:ea typeface="Be Vietnam Pro" pitchFamily="34" charset="-122"/>
+                <a:cs typeface="Be Vietnam Pro" pitchFamily="34" charset="-120"/>
+              </a:rPr>
+              <a:t> visibility:</a:t>
+            </a:r>
+            <a:r>
+              <a:rPr lang="en-US" sz="3000" b="1" dirty="0" spc="-5" kern="0">
+                <a:solidFill>
+                  <a:srgbClr val="3DD6A0"/>
+                </a:solidFill>
+                <a:latin typeface="Be Vietnam Pro" pitchFamily="34" charset="0"/>
+                <a:ea typeface="Be Vietnam Pro" pitchFamily="34" charset="-122"/>
+                <a:cs typeface="Be Vietnam Pro" pitchFamily="34" charset="-120"/>
+              </a:rPr>
+              <a:t> hidden:</a:t>
+            </a:r>
+            <a:pPr algn="l" indent="0" marL="0">
+              <a:lnSpc>
+                <a:spcPts val="3750"/>
+              </a:lnSpc>
+              <a:buNone/>
+            </a:pPr>
+            <a:r>
+              <a:rPr lang="en-US" sz="3000" b="1" dirty="0" spc="-8" kern="0">
+                <a:solidFill>
+                  <a:srgbClr val="F3EEE3"/>
+                </a:solidFill>
+                <a:latin typeface="Be Vietnam Pro" pitchFamily="34" charset="0"/>
+                <a:ea typeface="Be Vietnam Pro" pitchFamily="34" charset="-122"/>
+                <a:cs typeface="Be Vietnam Pro" pitchFamily="34" charset="-120"/>
+              </a:rPr>
+              <a:t> nó</a:t>
+            </a:r>
+            <a:r>
+              <a:rPr lang="en-US" sz="3000" b="1" dirty="0" spc="-10" kern="0">
+                <a:solidFill>
+                  <a:srgbClr val="F3EEE3"/>
+                </a:solidFill>
+                <a:latin typeface="Be Vietnam Pro" pitchFamily="34" charset="0"/>
+                <a:ea typeface="Be Vietnam Pro" pitchFamily="34" charset="-122"/>
+                <a:cs typeface="Be Vietnam Pro" pitchFamily="34" charset="-120"/>
+              </a:rPr>
+              <a:t> không</a:t>
+            </a:r>
+            <a:r>
+              <a:rPr lang="en-US" sz="3000" b="1" dirty="0" spc="-1" kern="0">
+                <a:solidFill>
+                  <a:srgbClr val="F3EEE3"/>
+                </a:solidFill>
+                <a:latin typeface="Be Vietnam Pro" pitchFamily="34" charset="0"/>
+                <a:ea typeface="Be Vietnam Pro" pitchFamily="34" charset="-122"/>
+                <a:cs typeface="Be Vietnam Pro" pitchFamily="34" charset="-120"/>
+              </a:rPr>
+              <a:t> nhìn</a:t>
+            </a:r>
+            <a:r>
+              <a:rPr lang="en-US" sz="3000" b="1" dirty="0" spc="-9" kern="0">
+                <a:solidFill>
+                  <a:srgbClr val="F3EEE3"/>
+                </a:solidFill>
+                <a:latin typeface="Be Vietnam Pro" pitchFamily="34" charset="0"/>
+                <a:ea typeface="Be Vietnam Pro" pitchFamily="34" charset="-122"/>
+                <a:cs typeface="Be Vietnam Pro" pitchFamily="34" charset="-120"/>
+              </a:rPr>
+              <a:t> thấy</a:t>
+            </a:r>
+            <a:r>
+              <a:rPr lang="en-US" sz="3000" b="1" dirty="0" spc="22" kern="0">
+                <a:solidFill>
+                  <a:srgbClr val="F3EEE3"/>
+                </a:solidFill>
+                <a:latin typeface="Be Vietnam Pro" pitchFamily="34" charset="0"/>
+                <a:ea typeface="Be Vietnam Pro" pitchFamily="34" charset="-122"/>
+                <a:cs typeface="Be Vietnam Pro" pitchFamily="34" charset="-120"/>
+              </a:rPr>
+              <a:t> nhưng</a:t>
+            </a:r>
+            <a:r>
+              <a:rPr lang="en-US" sz="3000" b="1" dirty="0" spc="-19" kern="0">
+                <a:solidFill>
+                  <a:srgbClr val="F3EEE3"/>
+                </a:solidFill>
+                <a:latin typeface="Be Vietnam Pro" pitchFamily="34" charset="0"/>
+                <a:ea typeface="Be Vietnam Pro" pitchFamily="34" charset="-122"/>
+                <a:cs typeface="Be Vietnam Pro" pitchFamily="34" charset="-120"/>
+              </a:rPr>
+              <a:t> vẫn</a:t>
+            </a:r>
+            <a:r>
+              <a:rPr lang="en-US" sz="3000" b="1" dirty="0" spc="-2" kern="0">
+                <a:solidFill>
+                  <a:srgbClr val="F3EEE3"/>
+                </a:solidFill>
+                <a:latin typeface="Be Vietnam Pro" pitchFamily="34" charset="0"/>
+                <a:ea typeface="Be Vietnam Pro" pitchFamily="34" charset="-122"/>
+                <a:cs typeface="Be Vietnam Pro" pitchFamily="34" charset="-120"/>
+              </a:rPr>
+              <a:t> chiếm</a:t>
+            </a:r>
+            <a:r>
+              <a:rPr lang="en-US" sz="3000" b="1" dirty="0" spc="-5" kern="0">
+                <a:solidFill>
+                  <a:srgbClr val="F3EEE3"/>
+                </a:solidFill>
+                <a:latin typeface="Be Vietnam Pro" pitchFamily="34" charset="0"/>
+                <a:ea typeface="Be Vietnam Pro" pitchFamily="34" charset="-122"/>
+                <a:cs typeface="Be Vietnam Pro" pitchFamily="34" charset="-120"/>
+              </a:rPr>
+              <a:t> chỗ</a:t>
+            </a:r>
+            <a:r>
+              <a:rPr lang="en-US" sz="3000" b="1" dirty="0" spc="-17" kern="0">
+                <a:solidFill>
+                  <a:srgbClr val="F3EEE3"/>
+                </a:solidFill>
+                <a:latin typeface="Be Vietnam Pro" pitchFamily="34" charset="0"/>
+                <a:ea typeface="Be Vietnam Pro" pitchFamily="34" charset="-122"/>
+                <a:cs typeface="Be Vietnam Pro" pitchFamily="34" charset="-120"/>
+              </a:rPr>
+              <a:t> trong layout.</a:t>
+            </a:r>
+            <a:r>
+              <a:rPr lang="en-US" sz="3000" b="1" dirty="0" spc="-3" kern="0">
+                <a:solidFill>
+                  <a:srgbClr val="F3EEE3"/>
+                </a:solidFill>
+                <a:latin typeface="Be Vietnam Pro" pitchFamily="34" charset="0"/>
+                <a:ea typeface="Be Vietnam Pro" pitchFamily="34" charset="-122"/>
+                <a:cs typeface="Be Vietnam Pro" pitchFamily="34" charset="-120"/>
+              </a:rPr>
+              <a:t> Phần</a:t>
+            </a:r>
+            <a:r>
+              <a:rPr lang="en-US" sz="3000" b="1" dirty="0" spc="3" kern="0">
+                <a:solidFill>
+                  <a:srgbClr val="F3EEE3"/>
+                </a:solidFill>
+                <a:latin typeface="Be Vietnam Pro" pitchFamily="34" charset="0"/>
+                <a:ea typeface="Be Vietnam Pro" pitchFamily="34" charset="-122"/>
+                <a:cs typeface="Be Vietnam Pro" pitchFamily="34" charset="-120"/>
+              </a:rPr>
+              <a:t> tử</a:t>
+            </a:r>
+            <a:r>
+              <a:rPr lang="en-US" sz="3000" b="1" dirty="0" spc="-6" kern="0">
+                <a:solidFill>
+                  <a:srgbClr val="F3EEE3"/>
+                </a:solidFill>
+                <a:latin typeface="Be Vietnam Pro" pitchFamily="34" charset="0"/>
+                <a:ea typeface="Be Vietnam Pro" pitchFamily="34" charset="-122"/>
+                <a:cs typeface="Be Vietnam Pro" pitchFamily="34" charset="-120"/>
+              </a:rPr>
+              <a:t> display:</a:t>
+            </a:r>
+            <a:r>
+              <a:rPr lang="en-US" sz="3000" b="1" dirty="0" spc="-12" kern="0">
+                <a:solidFill>
+                  <a:srgbClr val="F3EEE3"/>
+                </a:solidFill>
+                <a:latin typeface="Be Vietnam Pro" pitchFamily="34" charset="0"/>
+                <a:ea typeface="Be Vietnam Pro" pitchFamily="34" charset="-122"/>
+                <a:cs typeface="Be Vietnam Pro" pitchFamily="34" charset="-120"/>
+              </a:rPr>
+              <a:t> none</a:t>
+            </a:r>
+            <a:r>
+              <a:rPr lang="en-US" sz="3000" b="1" dirty="0" spc="-10" kern="0">
+                <a:solidFill>
+                  <a:srgbClr val="F3EEE3"/>
+                </a:solidFill>
+                <a:latin typeface="Be Vietnam Pro" pitchFamily="34" charset="0"/>
+                <a:ea typeface="Be Vietnam Pro" pitchFamily="34" charset="-122"/>
+                <a:cs typeface="Be Vietnam Pro" pitchFamily="34" charset="-120"/>
+              </a:rPr>
+              <a:t> không</a:t>
+            </a:r>
+            <a:r>
+              <a:rPr lang="en-US" sz="3000" b="1" dirty="0" spc="13" kern="0">
+                <a:solidFill>
+                  <a:srgbClr val="F3EEE3"/>
+                </a:solidFill>
+                <a:latin typeface="Be Vietnam Pro" pitchFamily="34" charset="0"/>
+                <a:ea typeface="Be Vietnam Pro" pitchFamily="34" charset="-122"/>
+                <a:cs typeface="Be Vietnam Pro" pitchFamily="34" charset="-120"/>
+              </a:rPr>
+              <a:t> được</a:t>
+            </a:r>
+            <a:r>
+              <a:rPr lang="en-US" sz="3000" b="1" dirty="0" spc="17" kern="0">
+                <a:solidFill>
+                  <a:srgbClr val="F3EEE3"/>
+                </a:solidFill>
+                <a:latin typeface="Be Vietnam Pro" pitchFamily="34" charset="0"/>
+                <a:ea typeface="Be Vietnam Pro" pitchFamily="34" charset="-122"/>
+                <a:cs typeface="Be Vietnam Pro" pitchFamily="34" charset="-120"/>
+              </a:rPr>
+              <a:t> đưa</a:t>
+            </a:r>
+            <a:r>
+              <a:rPr lang="en-US" sz="3000" b="1" dirty="0" spc="-16" kern="0">
+                <a:solidFill>
+                  <a:srgbClr val="F3EEE3"/>
+                </a:solidFill>
+                <a:latin typeface="Be Vietnam Pro" pitchFamily="34" charset="0"/>
+                <a:ea typeface="Be Vietnam Pro" pitchFamily="34" charset="-122"/>
+                <a:cs typeface="Be Vietnam Pro" pitchFamily="34" charset="-120"/>
+              </a:rPr>
+              <a:t> vào render</a:t>
+            </a:r>
+            <a:r>
+              <a:rPr lang="en-US" sz="3000" b="1" dirty="0" spc="-11" kern="0">
+                <a:solidFill>
+                  <a:srgbClr val="F3EEE3"/>
+                </a:solidFill>
+                <a:latin typeface="Be Vietnam Pro" pitchFamily="34" charset="0"/>
+                <a:ea typeface="Be Vietnam Pro" pitchFamily="34" charset="-122"/>
+                <a:cs typeface="Be Vietnam Pro" pitchFamily="34" charset="-120"/>
+              </a:rPr>
+              <a:t> tree.</a:t>
+            </a:r>
+            <a:endParaRPr lang="en-US" sz="3000" dirty="0"/>
+          </a:p>
+        </p:txBody>
+      </p:sp>
+      <p:sp>
+        <p:nvSpPr>
+          <p:cNvPr id="26" name="Shape 24"/>
           <p:cNvSpPr/>
           <p:nvPr/>
         </p:nvSpPr>
@@ -18732,7 +18185,7 @@
       </p:sp>
       <p:pic>
         <p:nvPicPr>
-          <p:cNvPr id="44" name="Moda image moda-export-watermark-618d1695-1770-44a6-9a3b-0b61890b3ad8" descr="">    </p:cNvPr>
+          <p:cNvPr id="27" name="Moda image moda-export-watermark-618d1695-1770-44a6-9a3b-0b61890b3ad8" descr="">    </p:cNvPr>
           <p:cNvPicPr>
             <a:picLocks noChangeAspect="1"/>
           </p:cNvPicPr>
